--- a/Report/WFH_Burnout_Predictor.pptx
+++ b/Report/WFH_Burnout_Predictor.pptx
@@ -162,12 +162,6 @@
             <c:idx val="0"/>
             <c:invertIfNegative val="0"/>
             <c:bubble3D val="0"/>
-            <c:spPr>
-              <a:solidFill>
-                <a:srgbClr val="2F5965"/>
-              </a:solidFill>
-              <a:effectLst/>
-            </c:spPr>
             <c:extLst>
               <c:ext xmlns:c16="http://schemas.microsoft.com/office/drawing/2014/chart" uri="{C3380CC4-5D6E-409C-BE32-E72D297353CC}">
                 <c16:uniqueId val="{00000001-785D-124B-A746-4737EF30611A}"/>
@@ -855,12 +849,6 @@
             <c:idx val="0"/>
             <c:invertIfNegative val="0"/>
             <c:bubble3D val="0"/>
-            <c:spPr>
-              <a:solidFill>
-                <a:srgbClr val="2F5965"/>
-              </a:solidFill>
-              <a:effectLst/>
-            </c:spPr>
             <c:extLst>
               <c:ext xmlns:c16="http://schemas.microsoft.com/office/drawing/2014/chart" uri="{C3380CC4-5D6E-409C-BE32-E72D297353CC}">
                 <c16:uniqueId val="{00000001-E449-014B-83D7-4D92A576882B}"/>
@@ -2591,1221 +2579,6 @@
       </p:grpSpPr>
       <p:sp>
         <p:nvSpPr>
-          <p:cNvPr id="2" name="Shape 0"/>
-          <p:cNvSpPr/>
-          <p:nvPr/>
-        </p:nvSpPr>
-        <p:spPr>
-          <a:xfrm>
-            <a:off x="7818120" y="777240"/>
-            <a:ext cx="68580" cy="68580"/>
-          </a:xfrm>
-          <a:prstGeom prst="ellipse">
-            <a:avLst/>
-          </a:prstGeom>
-          <a:solidFill>
-            <a:srgbClr val="2B3242"/>
-          </a:solidFill>
-          <a:ln/>
-        </p:spPr>
-        <p:txBody>
-          <a:bodyPr/>
-          <a:lstStyle/>
-          <a:p>
-            <a:endParaRPr lang="it-IT"/>
-          </a:p>
-        </p:txBody>
-      </p:sp>
-      <p:sp>
-        <p:nvSpPr>
-          <p:cNvPr id="3" name="Shape 1"/>
-          <p:cNvSpPr/>
-          <p:nvPr/>
-        </p:nvSpPr>
-        <p:spPr>
-          <a:xfrm>
-            <a:off x="8092440" y="777240"/>
-            <a:ext cx="68580" cy="68580"/>
-          </a:xfrm>
-          <a:prstGeom prst="ellipse">
-            <a:avLst/>
-          </a:prstGeom>
-          <a:solidFill>
-            <a:srgbClr val="2B3242"/>
-          </a:solidFill>
-          <a:ln/>
-        </p:spPr>
-        <p:txBody>
-          <a:bodyPr/>
-          <a:lstStyle/>
-          <a:p>
-            <a:endParaRPr lang="it-IT"/>
-          </a:p>
-        </p:txBody>
-      </p:sp>
-      <p:sp>
-        <p:nvSpPr>
-          <p:cNvPr id="4" name="Shape 2"/>
-          <p:cNvSpPr/>
-          <p:nvPr/>
-        </p:nvSpPr>
-        <p:spPr>
-          <a:xfrm>
-            <a:off x="8366760" y="777240"/>
-            <a:ext cx="68580" cy="68580"/>
-          </a:xfrm>
-          <a:prstGeom prst="ellipse">
-            <a:avLst/>
-          </a:prstGeom>
-          <a:solidFill>
-            <a:srgbClr val="2B3242"/>
-          </a:solidFill>
-          <a:ln/>
-        </p:spPr>
-        <p:txBody>
-          <a:bodyPr/>
-          <a:lstStyle/>
-          <a:p>
-            <a:endParaRPr lang="it-IT"/>
-          </a:p>
-        </p:txBody>
-      </p:sp>
-      <p:sp>
-        <p:nvSpPr>
-          <p:cNvPr id="5" name="Shape 3"/>
-          <p:cNvSpPr/>
-          <p:nvPr/>
-        </p:nvSpPr>
-        <p:spPr>
-          <a:xfrm>
-            <a:off x="8641080" y="777240"/>
-            <a:ext cx="68580" cy="68580"/>
-          </a:xfrm>
-          <a:prstGeom prst="ellipse">
-            <a:avLst/>
-          </a:prstGeom>
-          <a:solidFill>
-            <a:srgbClr val="2B3242"/>
-          </a:solidFill>
-          <a:ln/>
-        </p:spPr>
-        <p:txBody>
-          <a:bodyPr/>
-          <a:lstStyle/>
-          <a:p>
-            <a:endParaRPr lang="it-IT"/>
-          </a:p>
-        </p:txBody>
-      </p:sp>
-      <p:sp>
-        <p:nvSpPr>
-          <p:cNvPr id="6" name="Shape 4"/>
-          <p:cNvSpPr/>
-          <p:nvPr/>
-        </p:nvSpPr>
-        <p:spPr>
-          <a:xfrm>
-            <a:off x="8915400" y="777240"/>
-            <a:ext cx="68580" cy="68580"/>
-          </a:xfrm>
-          <a:prstGeom prst="ellipse">
-            <a:avLst/>
-          </a:prstGeom>
-          <a:solidFill>
-            <a:srgbClr val="2B3242"/>
-          </a:solidFill>
-          <a:ln/>
-        </p:spPr>
-        <p:txBody>
-          <a:bodyPr/>
-          <a:lstStyle/>
-          <a:p>
-            <a:endParaRPr lang="it-IT"/>
-          </a:p>
-        </p:txBody>
-      </p:sp>
-      <p:sp>
-        <p:nvSpPr>
-          <p:cNvPr id="7" name="Shape 5"/>
-          <p:cNvSpPr/>
-          <p:nvPr/>
-        </p:nvSpPr>
-        <p:spPr>
-          <a:xfrm>
-            <a:off x="9189720" y="777240"/>
-            <a:ext cx="68580" cy="68580"/>
-          </a:xfrm>
-          <a:prstGeom prst="ellipse">
-            <a:avLst/>
-          </a:prstGeom>
-          <a:solidFill>
-            <a:srgbClr val="D9A441"/>
-          </a:solidFill>
-          <a:ln/>
-        </p:spPr>
-        <p:txBody>
-          <a:bodyPr/>
-          <a:lstStyle/>
-          <a:p>
-            <a:endParaRPr lang="it-IT"/>
-          </a:p>
-        </p:txBody>
-      </p:sp>
-      <p:sp>
-        <p:nvSpPr>
-          <p:cNvPr id="8" name="Shape 6"/>
-          <p:cNvSpPr/>
-          <p:nvPr/>
-        </p:nvSpPr>
-        <p:spPr>
-          <a:xfrm>
-            <a:off x="9464040" y="777240"/>
-            <a:ext cx="68580" cy="68580"/>
-          </a:xfrm>
-          <a:prstGeom prst="ellipse">
-            <a:avLst/>
-          </a:prstGeom>
-          <a:solidFill>
-            <a:srgbClr val="2B3242"/>
-          </a:solidFill>
-          <a:ln/>
-        </p:spPr>
-        <p:txBody>
-          <a:bodyPr/>
-          <a:lstStyle/>
-          <a:p>
-            <a:endParaRPr lang="it-IT"/>
-          </a:p>
-        </p:txBody>
-      </p:sp>
-      <p:sp>
-        <p:nvSpPr>
-          <p:cNvPr id="9" name="Shape 7"/>
-          <p:cNvSpPr/>
-          <p:nvPr/>
-        </p:nvSpPr>
-        <p:spPr>
-          <a:xfrm>
-            <a:off x="9738360" y="777240"/>
-            <a:ext cx="68580" cy="68580"/>
-          </a:xfrm>
-          <a:prstGeom prst="ellipse">
-            <a:avLst/>
-          </a:prstGeom>
-          <a:solidFill>
-            <a:srgbClr val="2B3242"/>
-          </a:solidFill>
-          <a:ln/>
-        </p:spPr>
-        <p:txBody>
-          <a:bodyPr/>
-          <a:lstStyle/>
-          <a:p>
-            <a:endParaRPr lang="it-IT"/>
-          </a:p>
-        </p:txBody>
-      </p:sp>
-      <p:sp>
-        <p:nvSpPr>
-          <p:cNvPr id="10" name="Shape 8"/>
-          <p:cNvSpPr/>
-          <p:nvPr/>
-        </p:nvSpPr>
-        <p:spPr>
-          <a:xfrm>
-            <a:off x="10012680" y="777240"/>
-            <a:ext cx="68580" cy="68580"/>
-          </a:xfrm>
-          <a:prstGeom prst="ellipse">
-            <a:avLst/>
-          </a:prstGeom>
-          <a:solidFill>
-            <a:srgbClr val="2B3242"/>
-          </a:solidFill>
-          <a:ln/>
-        </p:spPr>
-        <p:txBody>
-          <a:bodyPr/>
-          <a:lstStyle/>
-          <a:p>
-            <a:endParaRPr lang="it-IT"/>
-          </a:p>
-        </p:txBody>
-      </p:sp>
-      <p:sp>
-        <p:nvSpPr>
-          <p:cNvPr id="11" name="Shape 9"/>
-          <p:cNvSpPr/>
-          <p:nvPr/>
-        </p:nvSpPr>
-        <p:spPr>
-          <a:xfrm>
-            <a:off x="7818120" y="1051560"/>
-            <a:ext cx="68580" cy="68580"/>
-          </a:xfrm>
-          <a:prstGeom prst="ellipse">
-            <a:avLst/>
-          </a:prstGeom>
-          <a:solidFill>
-            <a:srgbClr val="2B3242"/>
-          </a:solidFill>
-          <a:ln/>
-        </p:spPr>
-        <p:txBody>
-          <a:bodyPr/>
-          <a:lstStyle/>
-          <a:p>
-            <a:endParaRPr lang="it-IT"/>
-          </a:p>
-        </p:txBody>
-      </p:sp>
-      <p:sp>
-        <p:nvSpPr>
-          <p:cNvPr id="12" name="Shape 10"/>
-          <p:cNvSpPr/>
-          <p:nvPr/>
-        </p:nvSpPr>
-        <p:spPr>
-          <a:xfrm>
-            <a:off x="8092440" y="1051560"/>
-            <a:ext cx="68580" cy="68580"/>
-          </a:xfrm>
-          <a:prstGeom prst="ellipse">
-            <a:avLst/>
-          </a:prstGeom>
-          <a:solidFill>
-            <a:srgbClr val="2B3242"/>
-          </a:solidFill>
-          <a:ln/>
-        </p:spPr>
-        <p:txBody>
-          <a:bodyPr/>
-          <a:lstStyle/>
-          <a:p>
-            <a:endParaRPr lang="it-IT"/>
-          </a:p>
-        </p:txBody>
-      </p:sp>
-      <p:sp>
-        <p:nvSpPr>
-          <p:cNvPr id="13" name="Shape 11"/>
-          <p:cNvSpPr/>
-          <p:nvPr/>
-        </p:nvSpPr>
-        <p:spPr>
-          <a:xfrm>
-            <a:off x="8366760" y="1051560"/>
-            <a:ext cx="68580" cy="68580"/>
-          </a:xfrm>
-          <a:prstGeom prst="ellipse">
-            <a:avLst/>
-          </a:prstGeom>
-          <a:solidFill>
-            <a:srgbClr val="5C8B99"/>
-          </a:solidFill>
-          <a:ln/>
-        </p:spPr>
-        <p:txBody>
-          <a:bodyPr/>
-          <a:lstStyle/>
-          <a:p>
-            <a:endParaRPr lang="it-IT"/>
-          </a:p>
-        </p:txBody>
-      </p:sp>
-      <p:sp>
-        <p:nvSpPr>
-          <p:cNvPr id="14" name="Shape 12"/>
-          <p:cNvSpPr/>
-          <p:nvPr/>
-        </p:nvSpPr>
-        <p:spPr>
-          <a:xfrm>
-            <a:off x="8641080" y="1051560"/>
-            <a:ext cx="68580" cy="68580"/>
-          </a:xfrm>
-          <a:prstGeom prst="ellipse">
-            <a:avLst/>
-          </a:prstGeom>
-          <a:solidFill>
-            <a:srgbClr val="2B3242"/>
-          </a:solidFill>
-          <a:ln/>
-        </p:spPr>
-        <p:txBody>
-          <a:bodyPr/>
-          <a:lstStyle/>
-          <a:p>
-            <a:endParaRPr lang="it-IT"/>
-          </a:p>
-        </p:txBody>
-      </p:sp>
-      <p:sp>
-        <p:nvSpPr>
-          <p:cNvPr id="15" name="Shape 13"/>
-          <p:cNvSpPr/>
-          <p:nvPr/>
-        </p:nvSpPr>
-        <p:spPr>
-          <a:xfrm>
-            <a:off x="8915400" y="1051560"/>
-            <a:ext cx="68580" cy="68580"/>
-          </a:xfrm>
-          <a:prstGeom prst="ellipse">
-            <a:avLst/>
-          </a:prstGeom>
-          <a:solidFill>
-            <a:srgbClr val="2B3242"/>
-          </a:solidFill>
-          <a:ln/>
-        </p:spPr>
-        <p:txBody>
-          <a:bodyPr/>
-          <a:lstStyle/>
-          <a:p>
-            <a:endParaRPr lang="it-IT"/>
-          </a:p>
-        </p:txBody>
-      </p:sp>
-      <p:sp>
-        <p:nvSpPr>
-          <p:cNvPr id="16" name="Shape 14"/>
-          <p:cNvSpPr/>
-          <p:nvPr/>
-        </p:nvSpPr>
-        <p:spPr>
-          <a:xfrm>
-            <a:off x="9189720" y="1051560"/>
-            <a:ext cx="68580" cy="68580"/>
-          </a:xfrm>
-          <a:prstGeom prst="ellipse">
-            <a:avLst/>
-          </a:prstGeom>
-          <a:solidFill>
-            <a:srgbClr val="2B3242"/>
-          </a:solidFill>
-          <a:ln/>
-        </p:spPr>
-        <p:txBody>
-          <a:bodyPr/>
-          <a:lstStyle/>
-          <a:p>
-            <a:endParaRPr lang="it-IT"/>
-          </a:p>
-        </p:txBody>
-      </p:sp>
-      <p:sp>
-        <p:nvSpPr>
-          <p:cNvPr id="17" name="Shape 15"/>
-          <p:cNvSpPr/>
-          <p:nvPr/>
-        </p:nvSpPr>
-        <p:spPr>
-          <a:xfrm>
-            <a:off x="9464040" y="1051560"/>
-            <a:ext cx="68580" cy="68580"/>
-          </a:xfrm>
-          <a:prstGeom prst="ellipse">
-            <a:avLst/>
-          </a:prstGeom>
-          <a:solidFill>
-            <a:srgbClr val="2B3242"/>
-          </a:solidFill>
-          <a:ln/>
-        </p:spPr>
-        <p:txBody>
-          <a:bodyPr/>
-          <a:lstStyle/>
-          <a:p>
-            <a:endParaRPr lang="it-IT"/>
-          </a:p>
-        </p:txBody>
-      </p:sp>
-      <p:sp>
-        <p:nvSpPr>
-          <p:cNvPr id="18" name="Shape 16"/>
-          <p:cNvSpPr/>
-          <p:nvPr/>
-        </p:nvSpPr>
-        <p:spPr>
-          <a:xfrm>
-            <a:off x="9738360" y="1051560"/>
-            <a:ext cx="68580" cy="68580"/>
-          </a:xfrm>
-          <a:prstGeom prst="ellipse">
-            <a:avLst/>
-          </a:prstGeom>
-          <a:solidFill>
-            <a:srgbClr val="2B3242"/>
-          </a:solidFill>
-          <a:ln/>
-        </p:spPr>
-        <p:txBody>
-          <a:bodyPr/>
-          <a:lstStyle/>
-          <a:p>
-            <a:endParaRPr lang="it-IT"/>
-          </a:p>
-        </p:txBody>
-      </p:sp>
-      <p:sp>
-        <p:nvSpPr>
-          <p:cNvPr id="19" name="Shape 17"/>
-          <p:cNvSpPr/>
-          <p:nvPr/>
-        </p:nvSpPr>
-        <p:spPr>
-          <a:xfrm>
-            <a:off x="10012680" y="1051560"/>
-            <a:ext cx="68580" cy="68580"/>
-          </a:xfrm>
-          <a:prstGeom prst="ellipse">
-            <a:avLst/>
-          </a:prstGeom>
-          <a:solidFill>
-            <a:srgbClr val="DC5F34"/>
-          </a:solidFill>
-          <a:ln/>
-        </p:spPr>
-        <p:txBody>
-          <a:bodyPr/>
-          <a:lstStyle/>
-          <a:p>
-            <a:endParaRPr lang="it-IT"/>
-          </a:p>
-        </p:txBody>
-      </p:sp>
-      <p:sp>
-        <p:nvSpPr>
-          <p:cNvPr id="20" name="Shape 18"/>
-          <p:cNvSpPr/>
-          <p:nvPr/>
-        </p:nvSpPr>
-        <p:spPr>
-          <a:xfrm>
-            <a:off x="7818120" y="1325880"/>
-            <a:ext cx="68580" cy="68580"/>
-          </a:xfrm>
-          <a:prstGeom prst="ellipse">
-            <a:avLst/>
-          </a:prstGeom>
-          <a:solidFill>
-            <a:srgbClr val="2B3242"/>
-          </a:solidFill>
-          <a:ln/>
-        </p:spPr>
-        <p:txBody>
-          <a:bodyPr/>
-          <a:lstStyle/>
-          <a:p>
-            <a:endParaRPr lang="it-IT"/>
-          </a:p>
-        </p:txBody>
-      </p:sp>
-      <p:sp>
-        <p:nvSpPr>
-          <p:cNvPr id="21" name="Shape 19"/>
-          <p:cNvSpPr/>
-          <p:nvPr/>
-        </p:nvSpPr>
-        <p:spPr>
-          <a:xfrm>
-            <a:off x="8092440" y="1325880"/>
-            <a:ext cx="68580" cy="68580"/>
-          </a:xfrm>
-          <a:prstGeom prst="ellipse">
-            <a:avLst/>
-          </a:prstGeom>
-          <a:solidFill>
-            <a:srgbClr val="2B3242"/>
-          </a:solidFill>
-          <a:ln/>
-        </p:spPr>
-        <p:txBody>
-          <a:bodyPr/>
-          <a:lstStyle/>
-          <a:p>
-            <a:endParaRPr lang="it-IT"/>
-          </a:p>
-        </p:txBody>
-      </p:sp>
-      <p:sp>
-        <p:nvSpPr>
-          <p:cNvPr id="22" name="Shape 20"/>
-          <p:cNvSpPr/>
-          <p:nvPr/>
-        </p:nvSpPr>
-        <p:spPr>
-          <a:xfrm>
-            <a:off x="8366760" y="1325880"/>
-            <a:ext cx="68580" cy="68580"/>
-          </a:xfrm>
-          <a:prstGeom prst="ellipse">
-            <a:avLst/>
-          </a:prstGeom>
-          <a:solidFill>
-            <a:srgbClr val="2B3242"/>
-          </a:solidFill>
-          <a:ln/>
-        </p:spPr>
-        <p:txBody>
-          <a:bodyPr/>
-          <a:lstStyle/>
-          <a:p>
-            <a:endParaRPr lang="it-IT"/>
-          </a:p>
-        </p:txBody>
-      </p:sp>
-      <p:sp>
-        <p:nvSpPr>
-          <p:cNvPr id="23" name="Shape 21"/>
-          <p:cNvSpPr/>
-          <p:nvPr/>
-        </p:nvSpPr>
-        <p:spPr>
-          <a:xfrm>
-            <a:off x="8641080" y="1325880"/>
-            <a:ext cx="68580" cy="68580"/>
-          </a:xfrm>
-          <a:prstGeom prst="ellipse">
-            <a:avLst/>
-          </a:prstGeom>
-          <a:solidFill>
-            <a:srgbClr val="2B3242"/>
-          </a:solidFill>
-          <a:ln/>
-        </p:spPr>
-        <p:txBody>
-          <a:bodyPr/>
-          <a:lstStyle/>
-          <a:p>
-            <a:endParaRPr lang="it-IT"/>
-          </a:p>
-        </p:txBody>
-      </p:sp>
-      <p:sp>
-        <p:nvSpPr>
-          <p:cNvPr id="24" name="Shape 22"/>
-          <p:cNvSpPr/>
-          <p:nvPr/>
-        </p:nvSpPr>
-        <p:spPr>
-          <a:xfrm>
-            <a:off x="8915400" y="1325880"/>
-            <a:ext cx="68580" cy="68580"/>
-          </a:xfrm>
-          <a:prstGeom prst="ellipse">
-            <a:avLst/>
-          </a:prstGeom>
-          <a:solidFill>
-            <a:srgbClr val="5C8B99"/>
-          </a:solidFill>
-          <a:ln/>
-        </p:spPr>
-        <p:txBody>
-          <a:bodyPr/>
-          <a:lstStyle/>
-          <a:p>
-            <a:endParaRPr lang="it-IT"/>
-          </a:p>
-        </p:txBody>
-      </p:sp>
-      <p:sp>
-        <p:nvSpPr>
-          <p:cNvPr id="25" name="Shape 23"/>
-          <p:cNvSpPr/>
-          <p:nvPr/>
-        </p:nvSpPr>
-        <p:spPr>
-          <a:xfrm>
-            <a:off x="9189720" y="1325880"/>
-            <a:ext cx="68580" cy="68580"/>
-          </a:xfrm>
-          <a:prstGeom prst="ellipse">
-            <a:avLst/>
-          </a:prstGeom>
-          <a:solidFill>
-            <a:srgbClr val="2B3242"/>
-          </a:solidFill>
-          <a:ln/>
-        </p:spPr>
-        <p:txBody>
-          <a:bodyPr/>
-          <a:lstStyle/>
-          <a:p>
-            <a:endParaRPr lang="it-IT"/>
-          </a:p>
-        </p:txBody>
-      </p:sp>
-      <p:sp>
-        <p:nvSpPr>
-          <p:cNvPr id="26" name="Shape 24"/>
-          <p:cNvSpPr/>
-          <p:nvPr/>
-        </p:nvSpPr>
-        <p:spPr>
-          <a:xfrm>
-            <a:off x="9464040" y="1325880"/>
-            <a:ext cx="68580" cy="68580"/>
-          </a:xfrm>
-          <a:prstGeom prst="ellipse">
-            <a:avLst/>
-          </a:prstGeom>
-          <a:solidFill>
-            <a:srgbClr val="2B3242"/>
-          </a:solidFill>
-          <a:ln/>
-        </p:spPr>
-        <p:txBody>
-          <a:bodyPr/>
-          <a:lstStyle/>
-          <a:p>
-            <a:endParaRPr lang="it-IT"/>
-          </a:p>
-        </p:txBody>
-      </p:sp>
-      <p:sp>
-        <p:nvSpPr>
-          <p:cNvPr id="27" name="Shape 25"/>
-          <p:cNvSpPr/>
-          <p:nvPr/>
-        </p:nvSpPr>
-        <p:spPr>
-          <a:xfrm>
-            <a:off x="9738360" y="1325880"/>
-            <a:ext cx="68580" cy="68580"/>
-          </a:xfrm>
-          <a:prstGeom prst="ellipse">
-            <a:avLst/>
-          </a:prstGeom>
-          <a:solidFill>
-            <a:srgbClr val="2B3242"/>
-          </a:solidFill>
-          <a:ln/>
-        </p:spPr>
-        <p:txBody>
-          <a:bodyPr/>
-          <a:lstStyle/>
-          <a:p>
-            <a:endParaRPr lang="it-IT"/>
-          </a:p>
-        </p:txBody>
-      </p:sp>
-      <p:sp>
-        <p:nvSpPr>
-          <p:cNvPr id="28" name="Shape 26"/>
-          <p:cNvSpPr/>
-          <p:nvPr/>
-        </p:nvSpPr>
-        <p:spPr>
-          <a:xfrm>
-            <a:off x="10012680" y="1325880"/>
-            <a:ext cx="68580" cy="68580"/>
-          </a:xfrm>
-          <a:prstGeom prst="ellipse">
-            <a:avLst/>
-          </a:prstGeom>
-          <a:solidFill>
-            <a:srgbClr val="2B3242"/>
-          </a:solidFill>
-          <a:ln/>
-        </p:spPr>
-        <p:txBody>
-          <a:bodyPr/>
-          <a:lstStyle/>
-          <a:p>
-            <a:endParaRPr lang="it-IT"/>
-          </a:p>
-        </p:txBody>
-      </p:sp>
-      <p:sp>
-        <p:nvSpPr>
-          <p:cNvPr id="29" name="Shape 27"/>
-          <p:cNvSpPr/>
-          <p:nvPr/>
-        </p:nvSpPr>
-        <p:spPr>
-          <a:xfrm>
-            <a:off x="7818120" y="1600200"/>
-            <a:ext cx="68580" cy="68580"/>
-          </a:xfrm>
-          <a:prstGeom prst="ellipse">
-            <a:avLst/>
-          </a:prstGeom>
-          <a:solidFill>
-            <a:srgbClr val="2B3242"/>
-          </a:solidFill>
-          <a:ln/>
-        </p:spPr>
-        <p:txBody>
-          <a:bodyPr/>
-          <a:lstStyle/>
-          <a:p>
-            <a:endParaRPr lang="it-IT"/>
-          </a:p>
-        </p:txBody>
-      </p:sp>
-      <p:sp>
-        <p:nvSpPr>
-          <p:cNvPr id="30" name="Shape 28"/>
-          <p:cNvSpPr/>
-          <p:nvPr/>
-        </p:nvSpPr>
-        <p:spPr>
-          <a:xfrm>
-            <a:off x="8092440" y="1600200"/>
-            <a:ext cx="68580" cy="68580"/>
-          </a:xfrm>
-          <a:prstGeom prst="ellipse">
-            <a:avLst/>
-          </a:prstGeom>
-          <a:solidFill>
-            <a:srgbClr val="2B3242"/>
-          </a:solidFill>
-          <a:ln/>
-        </p:spPr>
-        <p:txBody>
-          <a:bodyPr/>
-          <a:lstStyle/>
-          <a:p>
-            <a:endParaRPr lang="it-IT"/>
-          </a:p>
-        </p:txBody>
-      </p:sp>
-      <p:sp>
-        <p:nvSpPr>
-          <p:cNvPr id="31" name="Shape 29"/>
-          <p:cNvSpPr/>
-          <p:nvPr/>
-        </p:nvSpPr>
-        <p:spPr>
-          <a:xfrm>
-            <a:off x="8366760" y="1600200"/>
-            <a:ext cx="68580" cy="68580"/>
-          </a:xfrm>
-          <a:prstGeom prst="ellipse">
-            <a:avLst/>
-          </a:prstGeom>
-          <a:solidFill>
-            <a:srgbClr val="2B3242"/>
-          </a:solidFill>
-          <a:ln/>
-        </p:spPr>
-        <p:txBody>
-          <a:bodyPr/>
-          <a:lstStyle/>
-          <a:p>
-            <a:endParaRPr lang="it-IT"/>
-          </a:p>
-        </p:txBody>
-      </p:sp>
-      <p:sp>
-        <p:nvSpPr>
-          <p:cNvPr id="32" name="Shape 30"/>
-          <p:cNvSpPr/>
-          <p:nvPr/>
-        </p:nvSpPr>
-        <p:spPr>
-          <a:xfrm>
-            <a:off x="8641080" y="1600200"/>
-            <a:ext cx="68580" cy="68580"/>
-          </a:xfrm>
-          <a:prstGeom prst="ellipse">
-            <a:avLst/>
-          </a:prstGeom>
-          <a:solidFill>
-            <a:srgbClr val="5C8B99"/>
-          </a:solidFill>
-          <a:ln/>
-        </p:spPr>
-        <p:txBody>
-          <a:bodyPr/>
-          <a:lstStyle/>
-          <a:p>
-            <a:endParaRPr lang="it-IT"/>
-          </a:p>
-        </p:txBody>
-      </p:sp>
-      <p:sp>
-        <p:nvSpPr>
-          <p:cNvPr id="33" name="Shape 31"/>
-          <p:cNvSpPr/>
-          <p:nvPr/>
-        </p:nvSpPr>
-        <p:spPr>
-          <a:xfrm>
-            <a:off x="8915400" y="1600200"/>
-            <a:ext cx="68580" cy="68580"/>
-          </a:xfrm>
-          <a:prstGeom prst="ellipse">
-            <a:avLst/>
-          </a:prstGeom>
-          <a:solidFill>
-            <a:srgbClr val="2B3242"/>
-          </a:solidFill>
-          <a:ln/>
-        </p:spPr>
-        <p:txBody>
-          <a:bodyPr/>
-          <a:lstStyle/>
-          <a:p>
-            <a:endParaRPr lang="it-IT"/>
-          </a:p>
-        </p:txBody>
-      </p:sp>
-      <p:sp>
-        <p:nvSpPr>
-          <p:cNvPr id="34" name="Shape 32"/>
-          <p:cNvSpPr/>
-          <p:nvPr/>
-        </p:nvSpPr>
-        <p:spPr>
-          <a:xfrm>
-            <a:off x="9189720" y="1600200"/>
-            <a:ext cx="68580" cy="68580"/>
-          </a:xfrm>
-          <a:prstGeom prst="ellipse">
-            <a:avLst/>
-          </a:prstGeom>
-          <a:solidFill>
-            <a:srgbClr val="2B3242"/>
-          </a:solidFill>
-          <a:ln/>
-        </p:spPr>
-        <p:txBody>
-          <a:bodyPr/>
-          <a:lstStyle/>
-          <a:p>
-            <a:endParaRPr lang="it-IT"/>
-          </a:p>
-        </p:txBody>
-      </p:sp>
-      <p:sp>
-        <p:nvSpPr>
-          <p:cNvPr id="35" name="Shape 33"/>
-          <p:cNvSpPr/>
-          <p:nvPr/>
-        </p:nvSpPr>
-        <p:spPr>
-          <a:xfrm>
-            <a:off x="9464040" y="1600200"/>
-            <a:ext cx="68580" cy="68580"/>
-          </a:xfrm>
-          <a:prstGeom prst="ellipse">
-            <a:avLst/>
-          </a:prstGeom>
-          <a:solidFill>
-            <a:srgbClr val="2B3242"/>
-          </a:solidFill>
-          <a:ln/>
-        </p:spPr>
-        <p:txBody>
-          <a:bodyPr/>
-          <a:lstStyle/>
-          <a:p>
-            <a:endParaRPr lang="it-IT"/>
-          </a:p>
-        </p:txBody>
-      </p:sp>
-      <p:sp>
-        <p:nvSpPr>
-          <p:cNvPr id="36" name="Shape 34"/>
-          <p:cNvSpPr/>
-          <p:nvPr/>
-        </p:nvSpPr>
-        <p:spPr>
-          <a:xfrm>
-            <a:off x="9738360" y="1600200"/>
-            <a:ext cx="68580" cy="68580"/>
-          </a:xfrm>
-          <a:prstGeom prst="ellipse">
-            <a:avLst/>
-          </a:prstGeom>
-          <a:solidFill>
-            <a:srgbClr val="DC5F34"/>
-          </a:solidFill>
-          <a:ln/>
-        </p:spPr>
-        <p:txBody>
-          <a:bodyPr/>
-          <a:lstStyle/>
-          <a:p>
-            <a:endParaRPr lang="it-IT"/>
-          </a:p>
-        </p:txBody>
-      </p:sp>
-      <p:sp>
-        <p:nvSpPr>
-          <p:cNvPr id="37" name="Shape 35"/>
-          <p:cNvSpPr/>
-          <p:nvPr/>
-        </p:nvSpPr>
-        <p:spPr>
-          <a:xfrm>
-            <a:off x="10012680" y="1600200"/>
-            <a:ext cx="68580" cy="68580"/>
-          </a:xfrm>
-          <a:prstGeom prst="ellipse">
-            <a:avLst/>
-          </a:prstGeom>
-          <a:solidFill>
-            <a:srgbClr val="2B3242"/>
-          </a:solidFill>
-          <a:ln/>
-        </p:spPr>
-        <p:txBody>
-          <a:bodyPr/>
-          <a:lstStyle/>
-          <a:p>
-            <a:endParaRPr lang="it-IT"/>
-          </a:p>
-        </p:txBody>
-      </p:sp>
-      <p:sp>
-        <p:nvSpPr>
-          <p:cNvPr id="38" name="Shape 36"/>
-          <p:cNvSpPr/>
-          <p:nvPr/>
-        </p:nvSpPr>
-        <p:spPr>
-          <a:xfrm>
-            <a:off x="7818120" y="1874520"/>
-            <a:ext cx="68580" cy="68580"/>
-          </a:xfrm>
-          <a:prstGeom prst="ellipse">
-            <a:avLst/>
-          </a:prstGeom>
-          <a:solidFill>
-            <a:srgbClr val="2B3242"/>
-          </a:solidFill>
-          <a:ln/>
-        </p:spPr>
-        <p:txBody>
-          <a:bodyPr/>
-          <a:lstStyle/>
-          <a:p>
-            <a:endParaRPr lang="it-IT"/>
-          </a:p>
-        </p:txBody>
-      </p:sp>
-      <p:sp>
-        <p:nvSpPr>
-          <p:cNvPr id="39" name="Shape 37"/>
-          <p:cNvSpPr/>
-          <p:nvPr/>
-        </p:nvSpPr>
-        <p:spPr>
-          <a:xfrm>
-            <a:off x="8092440" y="1874520"/>
-            <a:ext cx="68580" cy="68580"/>
-          </a:xfrm>
-          <a:prstGeom prst="ellipse">
-            <a:avLst/>
-          </a:prstGeom>
-          <a:solidFill>
-            <a:srgbClr val="D9A441"/>
-          </a:solidFill>
-          <a:ln/>
-        </p:spPr>
-        <p:txBody>
-          <a:bodyPr/>
-          <a:lstStyle/>
-          <a:p>
-            <a:endParaRPr lang="it-IT"/>
-          </a:p>
-        </p:txBody>
-      </p:sp>
-      <p:sp>
-        <p:nvSpPr>
-          <p:cNvPr id="40" name="Shape 38"/>
-          <p:cNvSpPr/>
-          <p:nvPr/>
-        </p:nvSpPr>
-        <p:spPr>
-          <a:xfrm>
-            <a:off x="8366760" y="1874520"/>
-            <a:ext cx="68580" cy="68580"/>
-          </a:xfrm>
-          <a:prstGeom prst="ellipse">
-            <a:avLst/>
-          </a:prstGeom>
-          <a:solidFill>
-            <a:srgbClr val="2B3242"/>
-          </a:solidFill>
-          <a:ln/>
-        </p:spPr>
-        <p:txBody>
-          <a:bodyPr/>
-          <a:lstStyle/>
-          <a:p>
-            <a:endParaRPr lang="it-IT"/>
-          </a:p>
-        </p:txBody>
-      </p:sp>
-      <p:sp>
-        <p:nvSpPr>
-          <p:cNvPr id="41" name="Shape 39"/>
-          <p:cNvSpPr/>
-          <p:nvPr/>
-        </p:nvSpPr>
-        <p:spPr>
-          <a:xfrm>
-            <a:off x="8641080" y="1874520"/>
-            <a:ext cx="68580" cy="68580"/>
-          </a:xfrm>
-          <a:prstGeom prst="ellipse">
-            <a:avLst/>
-          </a:prstGeom>
-          <a:solidFill>
-            <a:srgbClr val="2B3242"/>
-          </a:solidFill>
-          <a:ln/>
-        </p:spPr>
-        <p:txBody>
-          <a:bodyPr/>
-          <a:lstStyle/>
-          <a:p>
-            <a:endParaRPr lang="it-IT"/>
-          </a:p>
-        </p:txBody>
-      </p:sp>
-      <p:sp>
-        <p:nvSpPr>
-          <p:cNvPr id="42" name="Shape 40"/>
-          <p:cNvSpPr/>
-          <p:nvPr/>
-        </p:nvSpPr>
-        <p:spPr>
-          <a:xfrm>
-            <a:off x="8915400" y="1874520"/>
-            <a:ext cx="68580" cy="68580"/>
-          </a:xfrm>
-          <a:prstGeom prst="ellipse">
-            <a:avLst/>
-          </a:prstGeom>
-          <a:solidFill>
-            <a:srgbClr val="2B3242"/>
-          </a:solidFill>
-          <a:ln/>
-        </p:spPr>
-        <p:txBody>
-          <a:bodyPr/>
-          <a:lstStyle/>
-          <a:p>
-            <a:endParaRPr lang="it-IT"/>
-          </a:p>
-        </p:txBody>
-      </p:sp>
-      <p:sp>
-        <p:nvSpPr>
-          <p:cNvPr id="43" name="Shape 41"/>
-          <p:cNvSpPr/>
-          <p:nvPr/>
-        </p:nvSpPr>
-        <p:spPr>
-          <a:xfrm>
-            <a:off x="9189720" y="1874520"/>
-            <a:ext cx="68580" cy="68580"/>
-          </a:xfrm>
-          <a:prstGeom prst="ellipse">
-            <a:avLst/>
-          </a:prstGeom>
-          <a:solidFill>
-            <a:srgbClr val="2B3242"/>
-          </a:solidFill>
-          <a:ln/>
-        </p:spPr>
-        <p:txBody>
-          <a:bodyPr/>
-          <a:lstStyle/>
-          <a:p>
-            <a:endParaRPr lang="it-IT"/>
-          </a:p>
-        </p:txBody>
-      </p:sp>
-      <p:sp>
-        <p:nvSpPr>
-          <p:cNvPr id="44" name="Shape 42"/>
-          <p:cNvSpPr/>
-          <p:nvPr/>
-        </p:nvSpPr>
-        <p:spPr>
-          <a:xfrm>
-            <a:off x="9464040" y="1874520"/>
-            <a:ext cx="68580" cy="68580"/>
-          </a:xfrm>
-          <a:prstGeom prst="ellipse">
-            <a:avLst/>
-          </a:prstGeom>
-          <a:solidFill>
-            <a:srgbClr val="2B3242"/>
-          </a:solidFill>
-          <a:ln/>
-        </p:spPr>
-        <p:txBody>
-          <a:bodyPr/>
-          <a:lstStyle/>
-          <a:p>
-            <a:endParaRPr lang="it-IT"/>
-          </a:p>
-        </p:txBody>
-      </p:sp>
-      <p:sp>
-        <p:nvSpPr>
-          <p:cNvPr id="45" name="Shape 43"/>
-          <p:cNvSpPr/>
-          <p:nvPr/>
-        </p:nvSpPr>
-        <p:spPr>
-          <a:xfrm>
-            <a:off x="9738360" y="1874520"/>
-            <a:ext cx="68580" cy="68580"/>
-          </a:xfrm>
-          <a:prstGeom prst="ellipse">
-            <a:avLst/>
-          </a:prstGeom>
-          <a:solidFill>
-            <a:srgbClr val="2B3242"/>
-          </a:solidFill>
-          <a:ln/>
-        </p:spPr>
-        <p:txBody>
-          <a:bodyPr/>
-          <a:lstStyle/>
-          <a:p>
-            <a:endParaRPr lang="it-IT"/>
-          </a:p>
-        </p:txBody>
-      </p:sp>
-      <p:sp>
-        <p:nvSpPr>
-          <p:cNvPr id="46" name="Shape 44"/>
-          <p:cNvSpPr/>
-          <p:nvPr/>
-        </p:nvSpPr>
-        <p:spPr>
-          <a:xfrm>
-            <a:off x="10012680" y="1874520"/>
-            <a:ext cx="68580" cy="68580"/>
-          </a:xfrm>
-          <a:prstGeom prst="ellipse">
-            <a:avLst/>
-          </a:prstGeom>
-          <a:solidFill>
-            <a:srgbClr val="2B3242"/>
-          </a:solidFill>
-          <a:ln/>
-        </p:spPr>
-        <p:txBody>
-          <a:bodyPr/>
-          <a:lstStyle/>
-          <a:p>
-            <a:endParaRPr lang="it-IT"/>
-          </a:p>
-        </p:txBody>
-      </p:sp>
-      <p:sp>
-        <p:nvSpPr>
           <p:cNvPr id="47" name="Shape 45"/>
           <p:cNvSpPr/>
           <p:nvPr/>
@@ -4372,7 +3145,7 @@
                 <a:ea typeface="Cambria" pitchFamily="34" charset="-122"/>
                 <a:cs typeface="Cambria" pitchFamily="34" charset="-120"/>
               </a:rPr>
-              <a:t>0.803</a:t>
+              <a:t>0.700</a:t>
             </a:r>
             <a:endParaRPr lang="en-US" sz="3000" dirty="0"/>
           </a:p>
@@ -4453,7 +3226,7 @@
                 <a:ea typeface="Cambria" pitchFamily="34" charset="-122"/>
                 <a:cs typeface="Cambria" pitchFamily="34" charset="-120"/>
               </a:rPr>
-              <a:t>0.646</a:t>
+              <a:t>0.690</a:t>
             </a:r>
             <a:endParaRPr lang="en-US" sz="3000" dirty="0"/>
           </a:p>
@@ -4534,29 +3307,14 @@
                 <a:ea typeface="Cambria" pitchFamily="34" charset="-122"/>
                 <a:cs typeface="Cambria" pitchFamily="34" charset="-120"/>
               </a:rPr>
-              <a:t>Balanced Logistic</a:t>
+              <a:t>Random Forest</a:t>
             </a:r>
             <a:endParaRPr lang="en-US" sz="1700" dirty="0"/>
           </a:p>
           <a:p>
-            <a:pPr marL="0" indent="0">
-              <a:lnSpc>
-                <a:spcPct val="100000"/>
-              </a:lnSpc>
-              <a:buNone/>
-            </a:pPr>
-            <a:r>
-              <a:rPr lang="en-US" sz="1700" b="1" dirty="0">
-                <a:solidFill>
-                  <a:srgbClr val="171A21"/>
-                </a:solidFill>
-                <a:latin typeface="Cambria" pitchFamily="34" charset="0"/>
-                <a:ea typeface="Cambria" pitchFamily="34" charset="-122"/>
-                <a:cs typeface="Cambria" pitchFamily="34" charset="-120"/>
-              </a:rPr>
-              <a:t>Regression</a:t>
-            </a:r>
-            <a:endParaRPr lang="en-US" sz="1700" dirty="0"/>
+            <a:r>
+              <a:t>balanced</a:t>
+            </a:r>
           </a:p>
         </p:txBody>
       </p:sp>
@@ -4593,7 +3351,7 @@
                 <a:ea typeface="Calibri" pitchFamily="34" charset="-122"/>
                 <a:cs typeface="Calibri" pitchFamily="34" charset="-120"/>
               </a:rPr>
-              <a:t>Mest classifier</a:t>
+              <a:t>Best classifier</a:t>
             </a:r>
             <a:endParaRPr lang="en-US" sz="1150" dirty="0"/>
           </a:p>
@@ -5159,7 +3917,7 @@
                           <a:ea typeface="Calibri" pitchFamily="34" charset="-122"/>
                           <a:cs typeface="Calibri" pitchFamily="34" charset="-120"/>
                         </a:rPr>
-                        <a:t>0.93</a:t>
+                        <a:t>0.95</a:t>
                       </a:r>
                       <a:endParaRPr lang="en-US" sz="1200" dirty="0">
                         <a:latin typeface="Calibri" charset="0"/>
@@ -5227,7 +3985,7 @@
                           <a:ea typeface="Calibri" pitchFamily="34" charset="-122"/>
                           <a:cs typeface="Calibri" pitchFamily="34" charset="-120"/>
                         </a:rPr>
-                        <a:t>0.96</a:t>
+                        <a:t>0.97</a:t>
                       </a:r>
                       <a:endParaRPr lang="en-US" sz="1200" dirty="0">
                         <a:latin typeface="Calibri" charset="0"/>
@@ -5438,7 +4196,7 @@
                           <a:ea typeface="Calibri" pitchFamily="34" charset="-122"/>
                           <a:cs typeface="Calibri" pitchFamily="34" charset="-120"/>
                         </a:rPr>
-                        <a:t>0.68</a:t>
+                        <a:t>0.75</a:t>
                       </a:r>
                       <a:endParaRPr lang="en-US" sz="1200" dirty="0">
                         <a:latin typeface="Calibri" charset="0"/>
@@ -5506,7 +4264,7 @@
                           <a:ea typeface="Calibri" pitchFamily="34" charset="-122"/>
                           <a:cs typeface="Calibri" pitchFamily="34" charset="-120"/>
                         </a:rPr>
-                        <a:t>0.73</a:t>
+                        <a:t>0.90</a:t>
                       </a:r>
                       <a:endParaRPr lang="en-US" sz="1200" dirty="0">
                         <a:latin typeface="Calibri" charset="0"/>
@@ -5574,7 +4332,7 @@
                           <a:ea typeface="Calibri" pitchFamily="34" charset="-122"/>
                           <a:cs typeface="Calibri" pitchFamily="34" charset="-120"/>
                         </a:rPr>
-                        <a:t>0.70</a:t>
+                        <a:t>0.82</a:t>
                       </a:r>
                       <a:endParaRPr lang="en-US" sz="1200" dirty="0">
                         <a:latin typeface="Calibri" charset="0"/>
@@ -5785,7 +4543,7 @@
                           <a:ea typeface="Calibri" pitchFamily="34" charset="-122"/>
                           <a:cs typeface="Calibri" pitchFamily="34" charset="-120"/>
                         </a:rPr>
-                        <a:t>0.17</a:t>
+                        <a:t>0.33</a:t>
                       </a:r>
                       <a:endParaRPr lang="en-US" sz="1200" dirty="0">
                         <a:latin typeface="Calibri" charset="0"/>
@@ -5853,7 +4611,7 @@
                           <a:ea typeface="Calibri" pitchFamily="34" charset="-122"/>
                           <a:cs typeface="Calibri" pitchFamily="34" charset="-120"/>
                         </a:rPr>
-                        <a:t>0.75</a:t>
+                        <a:t>0.25</a:t>
                       </a:r>
                       <a:endParaRPr lang="en-US" sz="1200" dirty="0">
                         <a:latin typeface="Calibri" charset="0"/>
@@ -5921,7 +4679,7 @@
                           <a:ea typeface="Calibri" pitchFamily="34" charset="-122"/>
                           <a:cs typeface="Calibri" pitchFamily="34" charset="-120"/>
                         </a:rPr>
-                        <a:t>0.27</a:t>
+                        <a:t>0.29</a:t>
                       </a:r>
                       <a:endParaRPr lang="en-US" sz="1200" dirty="0">
                         <a:latin typeface="Calibri" charset="0"/>
@@ -6059,7 +4817,7 @@
         <p:spPr>
           <a:xfrm>
             <a:off x="640080" y="4745736"/>
-            <a:ext cx="10911535" cy="640080"/>
+            <a:ext cx="10911535" cy="1368000"/>
           </a:xfrm>
           <a:prstGeom prst="rect">
             <a:avLst/>
@@ -6071,90 +4829,37 @@
           <a:bodyPr wrap="square" lIns="0" tIns="0" rIns="0" bIns="0" rtlCol="0" anchor="ctr"/>
           <a:lstStyle/>
           <a:p>
-            <a:pPr marL="0" indent="0">
-              <a:lnSpc>
-                <a:spcPct val="125000"/>
-              </a:lnSpc>
-              <a:buNone/>
-            </a:pPr>
-            <a:r>
-              <a:rPr lang="en-US" sz="1200" dirty="0">
-                <a:solidFill>
-                  <a:srgbClr val="5B6270"/>
-                </a:solidFill>
-                <a:latin typeface="Calibri" pitchFamily="34" charset="0"/>
-                <a:ea typeface="Calibri" pitchFamily="34" charset="-122"/>
-                <a:cs typeface="Calibri" pitchFamily="34" charset="-120"/>
-              </a:rPr>
-              <a:t>Precision on High is low (because of many false alarms) but </a:t>
-            </a:r>
-            <a:r>
-              <a:rPr lang="en-US" sz="1200" b="1" dirty="0">
-                <a:solidFill>
-                  <a:srgbClr val="5B6270"/>
-                </a:solidFill>
-                <a:latin typeface="Calibri" pitchFamily="34" charset="0"/>
-                <a:ea typeface="Calibri" pitchFamily="34" charset="-122"/>
-                <a:cs typeface="Calibri" pitchFamily="34" charset="-120"/>
-              </a:rPr>
-              <a:t>recall</a:t>
-            </a:r>
-            <a:r>
-              <a:rPr lang="en-US" sz="1200" dirty="0">
-                <a:solidFill>
-                  <a:srgbClr val="5B6270"/>
-                </a:solidFill>
-                <a:latin typeface="Calibri" pitchFamily="34" charset="0"/>
-                <a:ea typeface="Calibri" pitchFamily="34" charset="-122"/>
-                <a:cs typeface="Calibri" pitchFamily="34" charset="-120"/>
-              </a:rPr>
-              <a:t> of </a:t>
-            </a:r>
-            <a:r>
-              <a:rPr lang="en-US" sz="1200" b="1" dirty="0">
-                <a:solidFill>
-                  <a:srgbClr val="5B6270"/>
-                </a:solidFill>
-                <a:latin typeface="Calibri" pitchFamily="34" charset="0"/>
-                <a:ea typeface="Calibri" pitchFamily="34" charset="-122"/>
-                <a:cs typeface="Calibri" pitchFamily="34" charset="-120"/>
-              </a:rPr>
-              <a:t>0.75</a:t>
-            </a:r>
-            <a:r>
-              <a:rPr lang="en-US" sz="1200" dirty="0">
-                <a:solidFill>
-                  <a:srgbClr val="5B6270"/>
-                </a:solidFill>
-                <a:latin typeface="Calibri" pitchFamily="34" charset="0"/>
-                <a:ea typeface="Calibri" pitchFamily="34" charset="-122"/>
-                <a:cs typeface="Calibri" pitchFamily="34" charset="-120"/>
-              </a:rPr>
-              <a:t> means </a:t>
-            </a:r>
-            <a:r>
-              <a:rPr lang="en-US" sz="1200" b="1" dirty="0">
-                <a:solidFill>
-                  <a:srgbClr val="5B6270"/>
-                </a:solidFill>
-                <a:latin typeface="Calibri" pitchFamily="34" charset="0"/>
-                <a:ea typeface="Calibri" pitchFamily="34" charset="-122"/>
-                <a:cs typeface="Calibri" pitchFamily="34" charset="-120"/>
-              </a:rPr>
-              <a:t>most true high-risk test cases are caught</a:t>
-            </a:r>
-            <a:r>
-              <a:rPr lang="en-US" sz="1200" dirty="0">
-                <a:solidFill>
-                  <a:srgbClr val="5B6270"/>
-                </a:solidFill>
-                <a:latin typeface="Calibri" pitchFamily="34" charset="0"/>
-                <a:ea typeface="Calibri" pitchFamily="34" charset="-122"/>
-                <a:cs typeface="Calibri" pitchFamily="34" charset="-120"/>
-              </a:rPr>
-              <a:t>. That recall is computed on just 4 examples, so should be treated as a direction, not a precise rate.</a:t>
-            </a:r>
-            <a:endParaRPr lang="en-US" sz="1200" dirty="0"/>
+            <a:r>
+              <a:rPr lang="en-US" sz="1100" dirty="0"/>
+              <a:t>Classifier selected by macro F1, which weights all three classes equally. </a:t>
+            </a:r>
+          </a:p>
+          <a:p>
+            <a:r>
+              <a:rPr lang="en-US" sz="1100" dirty="0"/>
+              <a:t>Random Forest balanced wins (macro F1 0.690 vs 0.646 for Logistic Regression). </a:t>
+            </a:r>
+          </a:p>
+          <a:p>
+            <a:endParaRPr lang="en-US" sz="1100" dirty="0"/>
+          </a:p>
+          <a:p>
+            <a:r>
+              <a:rPr lang="en-US" sz="1100" dirty="0"/>
+              <a:t>Note: LR had higher High-risk recall (0.75 vs 0.25): it caught 3 of 4 true High cases while RF catches only 1. </a:t>
+            </a:r>
+          </a:p>
+          <a:p>
+            <a:r>
+              <a:rPr lang="en-US" sz="1100" dirty="0"/>
+              <a:t>This is a genuine trade-off: for a screening tool, missing a real burnout case carries higher cost than a false alarm, making High recall operationally critical alongside macro F1. </a:t>
+            </a:r>
+          </a:p>
+          <a:p>
+            <a:r>
+              <a:rPr lang="en-US" sz="1100" dirty="0"/>
+              <a:t>All High-class figures rest on 4 test cases and should be read as directional only.</a:t>
+            </a:r>
           </a:p>
         </p:txBody>
       </p:sp>
@@ -6677,7 +5382,7 @@
         <p:spPr>
           <a:xfrm>
             <a:off x="4621682" y="2971800"/>
-            <a:ext cx="2948330" cy="1335024"/>
+            <a:ext cx="2948330" cy="1548000"/>
           </a:xfrm>
           <a:prstGeom prst="rect">
             <a:avLst/>
@@ -6707,6 +5412,32 @@
               <a:t>The dataset has no classic sensitive attributes. Errors and high-risk recall are still checked across day_type, after_hours_work and work-hour bands.</a:t>
             </a:r>
             <a:endParaRPr lang="en-US" sz="1150" dirty="0"/>
+          </a:p>
+          <a:p>
+            <a:r>
+              <a:rPr sz="900" i="1" dirty="0">
+                <a:solidFill>
+                  <a:srgbClr val="785000"/>
+                </a:solidFill>
+              </a:rPr>
+              <a:t>Note: High-risk recall per subgroup is computed on 0–3 positive cases </a:t>
+            </a:r>
+            <a:r>
+              <a:rPr lang="it-IT" sz="900" i="1" dirty="0">
+                <a:solidFill>
+                  <a:srgbClr val="785000"/>
+                </a:solidFill>
+              </a:rPr>
+              <a:t>so </a:t>
+            </a:r>
+            <a:r>
+              <a:rPr sz="900" i="1" dirty="0">
+                <a:solidFill>
+                  <a:srgbClr val="785000"/>
+                </a:solidFill>
+              </a:rPr>
+              <a:t>figures indicate direction, not statistical certainty.</a:t>
+            </a:r>
           </a:p>
         </p:txBody>
       </p:sp>
@@ -7136,654 +5867,6 @@
       </p:grpSpPr>
       <p:sp>
         <p:nvSpPr>
-          <p:cNvPr id="2" name="Shape 0"/>
-          <p:cNvSpPr/>
-          <p:nvPr/>
-        </p:nvSpPr>
-        <p:spPr>
-          <a:xfrm>
-            <a:off x="9189720" y="502920"/>
-            <a:ext cx="68580" cy="68580"/>
-          </a:xfrm>
-          <a:prstGeom prst="ellipse">
-            <a:avLst/>
-          </a:prstGeom>
-          <a:solidFill>
-            <a:srgbClr val="2B3242"/>
-          </a:solidFill>
-          <a:ln/>
-        </p:spPr>
-        <p:txBody>
-          <a:bodyPr/>
-          <a:lstStyle/>
-          <a:p>
-            <a:endParaRPr lang="it-IT"/>
-          </a:p>
-        </p:txBody>
-      </p:sp>
-      <p:sp>
-        <p:nvSpPr>
-          <p:cNvPr id="3" name="Shape 1"/>
-          <p:cNvSpPr/>
-          <p:nvPr/>
-        </p:nvSpPr>
-        <p:spPr>
-          <a:xfrm>
-            <a:off x="9464040" y="502920"/>
-            <a:ext cx="68580" cy="68580"/>
-          </a:xfrm>
-          <a:prstGeom prst="ellipse">
-            <a:avLst/>
-          </a:prstGeom>
-          <a:solidFill>
-            <a:srgbClr val="D9A441"/>
-          </a:solidFill>
-          <a:ln/>
-        </p:spPr>
-        <p:txBody>
-          <a:bodyPr/>
-          <a:lstStyle/>
-          <a:p>
-            <a:endParaRPr lang="it-IT"/>
-          </a:p>
-        </p:txBody>
-      </p:sp>
-      <p:sp>
-        <p:nvSpPr>
-          <p:cNvPr id="4" name="Shape 2"/>
-          <p:cNvSpPr/>
-          <p:nvPr/>
-        </p:nvSpPr>
-        <p:spPr>
-          <a:xfrm>
-            <a:off x="9738360" y="502920"/>
-            <a:ext cx="68580" cy="68580"/>
-          </a:xfrm>
-          <a:prstGeom prst="ellipse">
-            <a:avLst/>
-          </a:prstGeom>
-          <a:solidFill>
-            <a:srgbClr val="2B3242"/>
-          </a:solidFill>
-          <a:ln/>
-        </p:spPr>
-        <p:txBody>
-          <a:bodyPr/>
-          <a:lstStyle/>
-          <a:p>
-            <a:endParaRPr lang="it-IT"/>
-          </a:p>
-        </p:txBody>
-      </p:sp>
-      <p:sp>
-        <p:nvSpPr>
-          <p:cNvPr id="5" name="Shape 3"/>
-          <p:cNvSpPr/>
-          <p:nvPr/>
-        </p:nvSpPr>
-        <p:spPr>
-          <a:xfrm>
-            <a:off x="10012680" y="502920"/>
-            <a:ext cx="68580" cy="68580"/>
-          </a:xfrm>
-          <a:prstGeom prst="ellipse">
-            <a:avLst/>
-          </a:prstGeom>
-          <a:solidFill>
-            <a:srgbClr val="2B3242"/>
-          </a:solidFill>
-          <a:ln/>
-        </p:spPr>
-        <p:txBody>
-          <a:bodyPr/>
-          <a:lstStyle/>
-          <a:p>
-            <a:endParaRPr lang="it-IT"/>
-          </a:p>
-        </p:txBody>
-      </p:sp>
-      <p:sp>
-        <p:nvSpPr>
-          <p:cNvPr id="6" name="Shape 4"/>
-          <p:cNvSpPr/>
-          <p:nvPr/>
-        </p:nvSpPr>
-        <p:spPr>
-          <a:xfrm>
-            <a:off x="10287000" y="502920"/>
-            <a:ext cx="68580" cy="68580"/>
-          </a:xfrm>
-          <a:prstGeom prst="ellipse">
-            <a:avLst/>
-          </a:prstGeom>
-          <a:solidFill>
-            <a:srgbClr val="2B3242"/>
-          </a:solidFill>
-          <a:ln/>
-        </p:spPr>
-        <p:txBody>
-          <a:bodyPr/>
-          <a:lstStyle/>
-          <a:p>
-            <a:endParaRPr lang="it-IT"/>
-          </a:p>
-        </p:txBody>
-      </p:sp>
-      <p:sp>
-        <p:nvSpPr>
-          <p:cNvPr id="7" name="Shape 5"/>
-          <p:cNvSpPr/>
-          <p:nvPr/>
-        </p:nvSpPr>
-        <p:spPr>
-          <a:xfrm>
-            <a:off x="10561320" y="502920"/>
-            <a:ext cx="68580" cy="68580"/>
-          </a:xfrm>
-          <a:prstGeom prst="ellipse">
-            <a:avLst/>
-          </a:prstGeom>
-          <a:solidFill>
-            <a:srgbClr val="2B3242"/>
-          </a:solidFill>
-          <a:ln/>
-        </p:spPr>
-        <p:txBody>
-          <a:bodyPr/>
-          <a:lstStyle/>
-          <a:p>
-            <a:endParaRPr lang="it-IT"/>
-          </a:p>
-        </p:txBody>
-      </p:sp>
-      <p:sp>
-        <p:nvSpPr>
-          <p:cNvPr id="8" name="Shape 6"/>
-          <p:cNvSpPr/>
-          <p:nvPr/>
-        </p:nvSpPr>
-        <p:spPr>
-          <a:xfrm>
-            <a:off x="9189720" y="777240"/>
-            <a:ext cx="68580" cy="68580"/>
-          </a:xfrm>
-          <a:prstGeom prst="ellipse">
-            <a:avLst/>
-          </a:prstGeom>
-          <a:solidFill>
-            <a:srgbClr val="2B3242"/>
-          </a:solidFill>
-          <a:ln/>
-        </p:spPr>
-        <p:txBody>
-          <a:bodyPr/>
-          <a:lstStyle/>
-          <a:p>
-            <a:endParaRPr lang="it-IT"/>
-          </a:p>
-        </p:txBody>
-      </p:sp>
-      <p:sp>
-        <p:nvSpPr>
-          <p:cNvPr id="9" name="Shape 7"/>
-          <p:cNvSpPr/>
-          <p:nvPr/>
-        </p:nvSpPr>
-        <p:spPr>
-          <a:xfrm>
-            <a:off x="9464040" y="777240"/>
-            <a:ext cx="68580" cy="68580"/>
-          </a:xfrm>
-          <a:prstGeom prst="ellipse">
-            <a:avLst/>
-          </a:prstGeom>
-          <a:solidFill>
-            <a:srgbClr val="2B3242"/>
-          </a:solidFill>
-          <a:ln/>
-        </p:spPr>
-        <p:txBody>
-          <a:bodyPr/>
-          <a:lstStyle/>
-          <a:p>
-            <a:endParaRPr lang="it-IT"/>
-          </a:p>
-        </p:txBody>
-      </p:sp>
-      <p:sp>
-        <p:nvSpPr>
-          <p:cNvPr id="10" name="Shape 8"/>
-          <p:cNvSpPr/>
-          <p:nvPr/>
-        </p:nvSpPr>
-        <p:spPr>
-          <a:xfrm>
-            <a:off x="9738360" y="777240"/>
-            <a:ext cx="68580" cy="68580"/>
-          </a:xfrm>
-          <a:prstGeom prst="ellipse">
-            <a:avLst/>
-          </a:prstGeom>
-          <a:solidFill>
-            <a:srgbClr val="2B3242"/>
-          </a:solidFill>
-          <a:ln/>
-        </p:spPr>
-        <p:txBody>
-          <a:bodyPr/>
-          <a:lstStyle/>
-          <a:p>
-            <a:endParaRPr lang="it-IT"/>
-          </a:p>
-        </p:txBody>
-      </p:sp>
-      <p:sp>
-        <p:nvSpPr>
-          <p:cNvPr id="11" name="Shape 9"/>
-          <p:cNvSpPr/>
-          <p:nvPr/>
-        </p:nvSpPr>
-        <p:spPr>
-          <a:xfrm>
-            <a:off x="10012680" y="777240"/>
-            <a:ext cx="68580" cy="68580"/>
-          </a:xfrm>
-          <a:prstGeom prst="ellipse">
-            <a:avLst/>
-          </a:prstGeom>
-          <a:solidFill>
-            <a:srgbClr val="2B3242"/>
-          </a:solidFill>
-          <a:ln/>
-        </p:spPr>
-        <p:txBody>
-          <a:bodyPr/>
-          <a:lstStyle/>
-          <a:p>
-            <a:endParaRPr lang="it-IT"/>
-          </a:p>
-        </p:txBody>
-      </p:sp>
-      <p:sp>
-        <p:nvSpPr>
-          <p:cNvPr id="12" name="Shape 10"/>
-          <p:cNvSpPr/>
-          <p:nvPr/>
-        </p:nvSpPr>
-        <p:spPr>
-          <a:xfrm>
-            <a:off x="10287000" y="777240"/>
-            <a:ext cx="68580" cy="68580"/>
-          </a:xfrm>
-          <a:prstGeom prst="ellipse">
-            <a:avLst/>
-          </a:prstGeom>
-          <a:solidFill>
-            <a:srgbClr val="2B3242"/>
-          </a:solidFill>
-          <a:ln/>
-        </p:spPr>
-        <p:txBody>
-          <a:bodyPr/>
-          <a:lstStyle/>
-          <a:p>
-            <a:endParaRPr lang="it-IT"/>
-          </a:p>
-        </p:txBody>
-      </p:sp>
-      <p:sp>
-        <p:nvSpPr>
-          <p:cNvPr id="13" name="Shape 11"/>
-          <p:cNvSpPr/>
-          <p:nvPr/>
-        </p:nvSpPr>
-        <p:spPr>
-          <a:xfrm>
-            <a:off x="10561320" y="777240"/>
-            <a:ext cx="68580" cy="68580"/>
-          </a:xfrm>
-          <a:prstGeom prst="ellipse">
-            <a:avLst/>
-          </a:prstGeom>
-          <a:solidFill>
-            <a:srgbClr val="2B3242"/>
-          </a:solidFill>
-          <a:ln/>
-        </p:spPr>
-        <p:txBody>
-          <a:bodyPr/>
-          <a:lstStyle/>
-          <a:p>
-            <a:endParaRPr lang="it-IT"/>
-          </a:p>
-        </p:txBody>
-      </p:sp>
-      <p:sp>
-        <p:nvSpPr>
-          <p:cNvPr id="14" name="Shape 12"/>
-          <p:cNvSpPr/>
-          <p:nvPr/>
-        </p:nvSpPr>
-        <p:spPr>
-          <a:xfrm>
-            <a:off x="9189720" y="1051560"/>
-            <a:ext cx="68580" cy="68580"/>
-          </a:xfrm>
-          <a:prstGeom prst="ellipse">
-            <a:avLst/>
-          </a:prstGeom>
-          <a:solidFill>
-            <a:srgbClr val="2B3242"/>
-          </a:solidFill>
-          <a:ln/>
-        </p:spPr>
-        <p:txBody>
-          <a:bodyPr/>
-          <a:lstStyle/>
-          <a:p>
-            <a:endParaRPr lang="it-IT"/>
-          </a:p>
-        </p:txBody>
-      </p:sp>
-      <p:sp>
-        <p:nvSpPr>
-          <p:cNvPr id="15" name="Shape 13"/>
-          <p:cNvSpPr/>
-          <p:nvPr/>
-        </p:nvSpPr>
-        <p:spPr>
-          <a:xfrm>
-            <a:off x="9464040" y="1051560"/>
-            <a:ext cx="68580" cy="68580"/>
-          </a:xfrm>
-          <a:prstGeom prst="ellipse">
-            <a:avLst/>
-          </a:prstGeom>
-          <a:solidFill>
-            <a:srgbClr val="2B3242"/>
-          </a:solidFill>
-          <a:ln/>
-        </p:spPr>
-        <p:txBody>
-          <a:bodyPr/>
-          <a:lstStyle/>
-          <a:p>
-            <a:endParaRPr lang="it-IT"/>
-          </a:p>
-        </p:txBody>
-      </p:sp>
-      <p:sp>
-        <p:nvSpPr>
-          <p:cNvPr id="16" name="Shape 14"/>
-          <p:cNvSpPr/>
-          <p:nvPr/>
-        </p:nvSpPr>
-        <p:spPr>
-          <a:xfrm>
-            <a:off x="9738360" y="1051560"/>
-            <a:ext cx="68580" cy="68580"/>
-          </a:xfrm>
-          <a:prstGeom prst="ellipse">
-            <a:avLst/>
-          </a:prstGeom>
-          <a:solidFill>
-            <a:srgbClr val="2B3242"/>
-          </a:solidFill>
-          <a:ln/>
-        </p:spPr>
-        <p:txBody>
-          <a:bodyPr/>
-          <a:lstStyle/>
-          <a:p>
-            <a:endParaRPr lang="it-IT"/>
-          </a:p>
-        </p:txBody>
-      </p:sp>
-      <p:sp>
-        <p:nvSpPr>
-          <p:cNvPr id="17" name="Shape 15"/>
-          <p:cNvSpPr/>
-          <p:nvPr/>
-        </p:nvSpPr>
-        <p:spPr>
-          <a:xfrm>
-            <a:off x="10012680" y="1051560"/>
-            <a:ext cx="68580" cy="68580"/>
-          </a:xfrm>
-          <a:prstGeom prst="ellipse">
-            <a:avLst/>
-          </a:prstGeom>
-          <a:solidFill>
-            <a:srgbClr val="DC5F34"/>
-          </a:solidFill>
-          <a:ln/>
-        </p:spPr>
-        <p:txBody>
-          <a:bodyPr/>
-          <a:lstStyle/>
-          <a:p>
-            <a:endParaRPr lang="it-IT"/>
-          </a:p>
-        </p:txBody>
-      </p:sp>
-      <p:sp>
-        <p:nvSpPr>
-          <p:cNvPr id="18" name="Shape 16"/>
-          <p:cNvSpPr/>
-          <p:nvPr/>
-        </p:nvSpPr>
-        <p:spPr>
-          <a:xfrm>
-            <a:off x="10287000" y="1051560"/>
-            <a:ext cx="68580" cy="68580"/>
-          </a:xfrm>
-          <a:prstGeom prst="ellipse">
-            <a:avLst/>
-          </a:prstGeom>
-          <a:solidFill>
-            <a:srgbClr val="2B3242"/>
-          </a:solidFill>
-          <a:ln/>
-        </p:spPr>
-        <p:txBody>
-          <a:bodyPr/>
-          <a:lstStyle/>
-          <a:p>
-            <a:endParaRPr lang="it-IT"/>
-          </a:p>
-        </p:txBody>
-      </p:sp>
-      <p:sp>
-        <p:nvSpPr>
-          <p:cNvPr id="19" name="Shape 17"/>
-          <p:cNvSpPr/>
-          <p:nvPr/>
-        </p:nvSpPr>
-        <p:spPr>
-          <a:xfrm>
-            <a:off x="10561320" y="1051560"/>
-            <a:ext cx="68580" cy="68580"/>
-          </a:xfrm>
-          <a:prstGeom prst="ellipse">
-            <a:avLst/>
-          </a:prstGeom>
-          <a:solidFill>
-            <a:srgbClr val="2B3242"/>
-          </a:solidFill>
-          <a:ln/>
-        </p:spPr>
-        <p:txBody>
-          <a:bodyPr/>
-          <a:lstStyle/>
-          <a:p>
-            <a:endParaRPr lang="it-IT"/>
-          </a:p>
-        </p:txBody>
-      </p:sp>
-      <p:sp>
-        <p:nvSpPr>
-          <p:cNvPr id="20" name="Shape 18"/>
-          <p:cNvSpPr/>
-          <p:nvPr/>
-        </p:nvSpPr>
-        <p:spPr>
-          <a:xfrm>
-            <a:off x="9189720" y="1325880"/>
-            <a:ext cx="68580" cy="68580"/>
-          </a:xfrm>
-          <a:prstGeom prst="ellipse">
-            <a:avLst/>
-          </a:prstGeom>
-          <a:solidFill>
-            <a:srgbClr val="5C8B99"/>
-          </a:solidFill>
-          <a:ln/>
-        </p:spPr>
-        <p:txBody>
-          <a:bodyPr/>
-          <a:lstStyle/>
-          <a:p>
-            <a:endParaRPr lang="it-IT"/>
-          </a:p>
-        </p:txBody>
-      </p:sp>
-      <p:sp>
-        <p:nvSpPr>
-          <p:cNvPr id="21" name="Shape 19"/>
-          <p:cNvSpPr/>
-          <p:nvPr/>
-        </p:nvSpPr>
-        <p:spPr>
-          <a:xfrm>
-            <a:off x="9464040" y="1325880"/>
-            <a:ext cx="68580" cy="68580"/>
-          </a:xfrm>
-          <a:prstGeom prst="ellipse">
-            <a:avLst/>
-          </a:prstGeom>
-          <a:solidFill>
-            <a:srgbClr val="2B3242"/>
-          </a:solidFill>
-          <a:ln/>
-        </p:spPr>
-        <p:txBody>
-          <a:bodyPr/>
-          <a:lstStyle/>
-          <a:p>
-            <a:endParaRPr lang="it-IT"/>
-          </a:p>
-        </p:txBody>
-      </p:sp>
-      <p:sp>
-        <p:nvSpPr>
-          <p:cNvPr id="22" name="Shape 20"/>
-          <p:cNvSpPr/>
-          <p:nvPr/>
-        </p:nvSpPr>
-        <p:spPr>
-          <a:xfrm>
-            <a:off x="9738360" y="1325880"/>
-            <a:ext cx="68580" cy="68580"/>
-          </a:xfrm>
-          <a:prstGeom prst="ellipse">
-            <a:avLst/>
-          </a:prstGeom>
-          <a:solidFill>
-            <a:srgbClr val="2B3242"/>
-          </a:solidFill>
-          <a:ln/>
-        </p:spPr>
-        <p:txBody>
-          <a:bodyPr/>
-          <a:lstStyle/>
-          <a:p>
-            <a:endParaRPr lang="it-IT"/>
-          </a:p>
-        </p:txBody>
-      </p:sp>
-      <p:sp>
-        <p:nvSpPr>
-          <p:cNvPr id="23" name="Shape 21"/>
-          <p:cNvSpPr/>
-          <p:nvPr/>
-        </p:nvSpPr>
-        <p:spPr>
-          <a:xfrm>
-            <a:off x="10012680" y="1325880"/>
-            <a:ext cx="68580" cy="68580"/>
-          </a:xfrm>
-          <a:prstGeom prst="ellipse">
-            <a:avLst/>
-          </a:prstGeom>
-          <a:solidFill>
-            <a:srgbClr val="2B3242"/>
-          </a:solidFill>
-          <a:ln/>
-        </p:spPr>
-        <p:txBody>
-          <a:bodyPr/>
-          <a:lstStyle/>
-          <a:p>
-            <a:endParaRPr lang="it-IT"/>
-          </a:p>
-        </p:txBody>
-      </p:sp>
-      <p:sp>
-        <p:nvSpPr>
-          <p:cNvPr id="24" name="Shape 22"/>
-          <p:cNvSpPr/>
-          <p:nvPr/>
-        </p:nvSpPr>
-        <p:spPr>
-          <a:xfrm>
-            <a:off x="10287000" y="1325880"/>
-            <a:ext cx="68580" cy="68580"/>
-          </a:xfrm>
-          <a:prstGeom prst="ellipse">
-            <a:avLst/>
-          </a:prstGeom>
-          <a:solidFill>
-            <a:srgbClr val="2B3242"/>
-          </a:solidFill>
-          <a:ln/>
-        </p:spPr>
-        <p:txBody>
-          <a:bodyPr/>
-          <a:lstStyle/>
-          <a:p>
-            <a:endParaRPr lang="it-IT"/>
-          </a:p>
-        </p:txBody>
-      </p:sp>
-      <p:sp>
-        <p:nvSpPr>
-          <p:cNvPr id="25" name="Shape 23"/>
-          <p:cNvSpPr/>
-          <p:nvPr/>
-        </p:nvSpPr>
-        <p:spPr>
-          <a:xfrm>
-            <a:off x="10561320" y="1325880"/>
-            <a:ext cx="68580" cy="68580"/>
-          </a:xfrm>
-          <a:prstGeom prst="ellipse">
-            <a:avLst/>
-          </a:prstGeom>
-          <a:solidFill>
-            <a:srgbClr val="2B3242"/>
-          </a:solidFill>
-          <a:ln/>
-        </p:spPr>
-        <p:txBody>
-          <a:bodyPr/>
-          <a:lstStyle/>
-          <a:p>
-            <a:endParaRPr lang="it-IT"/>
-          </a:p>
-        </p:txBody>
-      </p:sp>
-      <p:sp>
-        <p:nvSpPr>
           <p:cNvPr id="26" name="Shape 24"/>
           <p:cNvSpPr/>
           <p:nvPr/>
@@ -8324,7 +6407,7 @@
                 <a:ea typeface="Calibri" pitchFamily="34" charset="-122"/>
                 <a:cs typeface="Calibri" pitchFamily="34" charset="-120"/>
               </a:rPr>
-              <a:t>Tuned Random Forest reaches MAE 4.88 and R² 0.936 on employees unseen during training.</a:t>
+              <a:t>Tuned Random Forest reaches MAE 4.84 and R² 0.935 on employees unseen during training.</a:t>
             </a:r>
             <a:endParaRPr lang="en-US" sz="1200" dirty="0"/>
           </a:p>
@@ -8969,10 +7052,9 @@
                   <a:srgbClr val="171A21"/>
                 </a:solidFill>
                 <a:latin typeface="Calibri" pitchFamily="34" charset="0"/>
-                <a:ea typeface="Calibri" pitchFamily="34" charset="-122"/>
                 <a:cs typeface="Calibri" pitchFamily="34" charset="-120"/>
               </a:rPr>
-              <a:t>Why this approach</a:t>
+              <a:t>Key design decisions</a:t>
             </a:r>
             <a:endParaRPr lang="en-US" sz="1350" dirty="0"/>
           </a:p>
@@ -12759,7 +10841,7 @@
         <p:spPr>
           <a:xfrm>
             <a:off x="7132320" y="4177734"/>
-            <a:ext cx="4419295" cy="594360"/>
+            <a:ext cx="4419295" cy="1007999"/>
           </a:xfrm>
           <a:prstGeom prst="rect">
             <a:avLst/>
@@ -12771,24 +10853,16 @@
           <a:bodyPr wrap="square" lIns="0" tIns="0" rIns="0" bIns="0" rtlCol="0" anchor="ctr"/>
           <a:lstStyle/>
           <a:p>
-            <a:pPr marL="0" indent="0">
-              <a:lnSpc>
-                <a:spcPct val="120000"/>
-              </a:lnSpc>
-              <a:buNone/>
-            </a:pPr>
-            <a:r>
-              <a:rPr lang="en-US" sz="1250" dirty="0">
-                <a:solidFill>
-                  <a:srgbClr val="171A21"/>
-                </a:solidFill>
-                <a:latin typeface="Calibri" pitchFamily="34" charset="0"/>
-                <a:ea typeface="Calibri" pitchFamily="34" charset="-122"/>
-                <a:cs typeface="Calibri" pitchFamily="34" charset="-120"/>
-              </a:rPr>
-              <a:t>The continuous burnout_score is therefore treated as the main target.</a:t>
-            </a:r>
-            <a:endParaRPr lang="en-US" sz="1250" dirty="0"/>
+            <a:r>
+              <a:rPr lang="en-US" sz="1100" dirty="0"/>
+              <a:t>burnout_score is treated as the main target: it drives the regression task and, through fixed thresholds, the risk class.</a:t>
+            </a:r>
+          </a:p>
+          <a:p>
+            <a:r>
+              <a:rPr lang="en-US" sz="1100" dirty="0"/>
+              <a:t>burnout_risk is a deterministic bucketing: Low ≤69.92 | Medium 70.01–109.99 | High ≥110.22 — non-overlapping bands, verified programmatically.</a:t>
+            </a:r>
           </a:p>
         </p:txBody>
       </p:sp>
@@ -13290,7 +11364,41 @@
               </a:rPr>
               <a:t>This is useful for prediction, but it is also the main warning sign of the project: the feature may sit very close to the logic that generated the target in the first place.</a:t>
             </a:r>
+          </a:p>
+          <a:p>
+            <a:pPr marL="0" indent="0">
+              <a:lnSpc>
+                <a:spcPct val="130000"/>
+              </a:lnSpc>
+              <a:buNone/>
+            </a:pPr>
             <a:endParaRPr lang="en-US" sz="1200" dirty="0"/>
+          </a:p>
+          <a:p>
+            <a:r>
+              <a:rPr sz="1200" dirty="0">
+                <a:solidFill>
+                  <a:srgbClr val="5B6270"/>
+                </a:solidFill>
+              </a:rPr>
+              <a:t>A univariate Ridge on </a:t>
+            </a:r>
+            <a:r>
+              <a:rPr sz="1200" dirty="0" err="1">
+                <a:solidFill>
+                  <a:srgbClr val="5B6270"/>
+                </a:solidFill>
+              </a:rPr>
+              <a:t>task_completion_rate</a:t>
+            </a:r>
+            <a:r>
+              <a:rPr sz="1200" dirty="0">
+                <a:solidFill>
+                  <a:srgbClr val="5B6270"/>
+                </a:solidFill>
+              </a:rPr>
+              <a:t> alone reaches test R²=0.934; the full 13-feature model achieves R²=0.936.</a:t>
+            </a:r>
           </a:p>
         </p:txBody>
       </p:sp>
@@ -14376,7 +12484,7 @@
         </p:nvSpPr>
         <p:spPr>
           <a:xfrm>
-            <a:off x="640080" y="4892040"/>
+            <a:off x="628751" y="5045798"/>
             <a:ext cx="10911535" cy="1325880"/>
           </a:xfrm>
           <a:prstGeom prst="roundRect">
@@ -14436,346 +12544,597 @@
           </a:p>
         </p:txBody>
       </p:sp>
-      <p:sp>
-        <p:nvSpPr>
-          <p:cNvPr id="29" name="Shape 24"/>
-          <p:cNvSpPr/>
-          <p:nvPr/>
-        </p:nvSpPr>
-        <p:spPr>
-          <a:xfrm>
-            <a:off x="877824" y="5458968"/>
-            <a:ext cx="1360627" cy="310896"/>
-          </a:xfrm>
-          <a:prstGeom prst="roundRect">
-            <a:avLst>
-              <a:gd name="adj" fmla="val 50000"/>
-            </a:avLst>
-          </a:prstGeom>
-          <a:solidFill>
-            <a:srgbClr val="E6EDEF"/>
-          </a:solidFill>
-          <a:ln/>
-        </p:spPr>
-        <p:txBody>
-          <a:bodyPr/>
-          <a:lstStyle/>
-          <a:p>
-            <a:endParaRPr lang="it-IT"/>
-          </a:p>
-        </p:txBody>
-      </p:sp>
-      <p:sp>
-        <p:nvSpPr>
-          <p:cNvPr id="30" name="Text 25"/>
-          <p:cNvSpPr/>
-          <p:nvPr/>
-        </p:nvSpPr>
-        <p:spPr>
-          <a:xfrm>
-            <a:off x="877824" y="5458968"/>
-            <a:ext cx="1360627" cy="310896"/>
-          </a:xfrm>
-          <a:prstGeom prst="rect">
-            <a:avLst/>
-          </a:prstGeom>
-          <a:noFill/>
-          <a:ln/>
-        </p:spPr>
-        <p:txBody>
-          <a:bodyPr wrap="square" lIns="0" tIns="0" rIns="0" bIns="0" rtlCol="0" anchor="ctr"/>
-          <a:lstStyle/>
-          <a:p>
-            <a:pPr marL="0" indent="0" algn="ctr">
-              <a:buNone/>
-            </a:pPr>
-            <a:r>
-              <a:rPr lang="en-US" sz="1100" dirty="0">
-                <a:solidFill>
-                  <a:srgbClr val="2F5965"/>
-                </a:solidFill>
-                <a:latin typeface="Calibri" pitchFamily="34" charset="0"/>
-                <a:ea typeface="Calibri" pitchFamily="34" charset="-122"/>
-                <a:cs typeface="Calibri" pitchFamily="34" charset="-120"/>
-              </a:rPr>
-              <a:t>work_intensity</a:t>
-            </a:r>
-            <a:endParaRPr lang="en-US" sz="1100" dirty="0"/>
-          </a:p>
-        </p:txBody>
-      </p:sp>
-      <p:sp>
-        <p:nvSpPr>
-          <p:cNvPr id="31" name="Shape 26"/>
-          <p:cNvSpPr/>
-          <p:nvPr/>
-        </p:nvSpPr>
-        <p:spPr>
-          <a:xfrm>
-            <a:off x="2348179" y="5458968"/>
-            <a:ext cx="1585570" cy="310896"/>
-          </a:xfrm>
-          <a:prstGeom prst="roundRect">
-            <a:avLst>
-              <a:gd name="adj" fmla="val 50000"/>
-            </a:avLst>
-          </a:prstGeom>
-          <a:solidFill>
-            <a:srgbClr val="E6EDEF"/>
-          </a:solidFill>
-          <a:ln/>
-        </p:spPr>
-        <p:txBody>
-          <a:bodyPr/>
-          <a:lstStyle/>
-          <a:p>
-            <a:endParaRPr lang="it-IT"/>
-          </a:p>
-        </p:txBody>
-      </p:sp>
-      <p:sp>
-        <p:nvSpPr>
-          <p:cNvPr id="32" name="Text 27"/>
-          <p:cNvSpPr/>
-          <p:nvPr/>
-        </p:nvSpPr>
-        <p:spPr>
-          <a:xfrm>
-            <a:off x="2348179" y="5458968"/>
-            <a:ext cx="1585570" cy="310896"/>
-          </a:xfrm>
-          <a:prstGeom prst="rect">
-            <a:avLst/>
-          </a:prstGeom>
-          <a:noFill/>
-          <a:ln/>
-        </p:spPr>
-        <p:txBody>
-          <a:bodyPr wrap="square" lIns="0" tIns="0" rIns="0" bIns="0" rtlCol="0" anchor="ctr"/>
-          <a:lstStyle/>
-          <a:p>
-            <a:pPr marL="0" indent="0" algn="ctr">
-              <a:buNone/>
-            </a:pPr>
-            <a:r>
-              <a:rPr lang="en-US" sz="1100" dirty="0">
-                <a:solidFill>
-                  <a:srgbClr val="2F5965"/>
-                </a:solidFill>
-                <a:latin typeface="Calibri" pitchFamily="34" charset="0"/>
-                <a:ea typeface="Calibri" pitchFamily="34" charset="-122"/>
-                <a:cs typeface="Calibri" pitchFamily="34" charset="-120"/>
-              </a:rPr>
-              <a:t>screen_work_ratio</a:t>
-            </a:r>
-            <a:endParaRPr lang="en-US" sz="1100" dirty="0"/>
-          </a:p>
-        </p:txBody>
-      </p:sp>
-      <p:sp>
-        <p:nvSpPr>
-          <p:cNvPr id="33" name="Shape 28"/>
-          <p:cNvSpPr/>
-          <p:nvPr/>
-        </p:nvSpPr>
-        <p:spPr>
-          <a:xfrm>
-            <a:off x="4043477" y="5458968"/>
-            <a:ext cx="1435608" cy="310896"/>
-          </a:xfrm>
-          <a:prstGeom prst="roundRect">
-            <a:avLst>
-              <a:gd name="adj" fmla="val 50000"/>
-            </a:avLst>
-          </a:prstGeom>
-          <a:solidFill>
-            <a:srgbClr val="E6EDEF"/>
-          </a:solidFill>
-          <a:ln/>
-        </p:spPr>
-        <p:txBody>
-          <a:bodyPr/>
-          <a:lstStyle/>
-          <a:p>
-            <a:endParaRPr lang="it-IT"/>
-          </a:p>
-        </p:txBody>
-      </p:sp>
-      <p:sp>
-        <p:nvSpPr>
-          <p:cNvPr id="34" name="Text 29"/>
-          <p:cNvSpPr/>
-          <p:nvPr/>
-        </p:nvSpPr>
-        <p:spPr>
-          <a:xfrm>
-            <a:off x="4043477" y="5458968"/>
-            <a:ext cx="1435608" cy="310896"/>
-          </a:xfrm>
-          <a:prstGeom prst="rect">
-            <a:avLst/>
-          </a:prstGeom>
-          <a:noFill/>
-          <a:ln/>
-        </p:spPr>
-        <p:txBody>
-          <a:bodyPr wrap="square" lIns="0" tIns="0" rIns="0" bIns="0" rtlCol="0" anchor="ctr"/>
-          <a:lstStyle/>
-          <a:p>
-            <a:pPr marL="0" indent="0" algn="ctr">
-              <a:buNone/>
-            </a:pPr>
-            <a:r>
-              <a:rPr lang="en-US" sz="1100" dirty="0">
-                <a:solidFill>
-                  <a:srgbClr val="2F5965"/>
-                </a:solidFill>
-                <a:latin typeface="Calibri" pitchFamily="34" charset="0"/>
-                <a:ea typeface="Calibri" pitchFamily="34" charset="-122"/>
-                <a:cs typeface="Calibri" pitchFamily="34" charset="-120"/>
-              </a:rPr>
-              <a:t>meeting_density</a:t>
-            </a:r>
-            <a:endParaRPr lang="en-US" sz="1100" dirty="0"/>
-          </a:p>
-        </p:txBody>
-      </p:sp>
-      <p:sp>
-        <p:nvSpPr>
-          <p:cNvPr id="35" name="Shape 30"/>
-          <p:cNvSpPr/>
-          <p:nvPr/>
-        </p:nvSpPr>
-        <p:spPr>
-          <a:xfrm>
-            <a:off x="5588813" y="5458968"/>
-            <a:ext cx="1285646" cy="310896"/>
-          </a:xfrm>
-          <a:prstGeom prst="roundRect">
-            <a:avLst>
-              <a:gd name="adj" fmla="val 50000"/>
-            </a:avLst>
-          </a:prstGeom>
-          <a:solidFill>
-            <a:srgbClr val="E6EDEF"/>
-          </a:solidFill>
-          <a:ln/>
-        </p:spPr>
-        <p:txBody>
-          <a:bodyPr/>
-          <a:lstStyle/>
-          <a:p>
-            <a:endParaRPr lang="it-IT"/>
-          </a:p>
-        </p:txBody>
-      </p:sp>
-      <p:sp>
-        <p:nvSpPr>
-          <p:cNvPr id="36" name="Text 31"/>
-          <p:cNvSpPr/>
-          <p:nvPr/>
-        </p:nvSpPr>
-        <p:spPr>
-          <a:xfrm>
-            <a:off x="5588813" y="5458968"/>
-            <a:ext cx="1285646" cy="310896"/>
-          </a:xfrm>
-          <a:prstGeom prst="rect">
-            <a:avLst/>
-          </a:prstGeom>
-          <a:noFill/>
-          <a:ln/>
-        </p:spPr>
-        <p:txBody>
-          <a:bodyPr wrap="square" lIns="0" tIns="0" rIns="0" bIns="0" rtlCol="0" anchor="ctr"/>
-          <a:lstStyle/>
-          <a:p>
-            <a:pPr marL="0" indent="0" algn="ctr">
-              <a:buNone/>
-            </a:pPr>
-            <a:r>
-              <a:rPr lang="en-US" sz="1100" dirty="0">
-                <a:solidFill>
-                  <a:srgbClr val="2F5965"/>
-                </a:solidFill>
-                <a:latin typeface="Calibri" pitchFamily="34" charset="0"/>
-                <a:ea typeface="Calibri" pitchFamily="34" charset="-122"/>
-                <a:cs typeface="Calibri" pitchFamily="34" charset="-120"/>
-              </a:rPr>
-              <a:t>sleep_deficit</a:t>
-            </a:r>
-            <a:endParaRPr lang="en-US" sz="1100" dirty="0"/>
-          </a:p>
-        </p:txBody>
-      </p:sp>
-      <p:sp>
-        <p:nvSpPr>
-          <p:cNvPr id="37" name="Shape 32"/>
-          <p:cNvSpPr/>
-          <p:nvPr/>
-        </p:nvSpPr>
-        <p:spPr>
-          <a:xfrm>
-            <a:off x="6984187" y="5458968"/>
-            <a:ext cx="1285646" cy="310896"/>
-          </a:xfrm>
-          <a:prstGeom prst="roundRect">
-            <a:avLst>
-              <a:gd name="adj" fmla="val 50000"/>
-            </a:avLst>
-          </a:prstGeom>
-          <a:solidFill>
-            <a:srgbClr val="E6EDEF"/>
-          </a:solidFill>
-          <a:ln/>
-        </p:spPr>
-        <p:txBody>
-          <a:bodyPr/>
-          <a:lstStyle/>
-          <a:p>
-            <a:endParaRPr lang="it-IT"/>
-          </a:p>
-        </p:txBody>
-      </p:sp>
-      <p:sp>
-        <p:nvSpPr>
-          <p:cNvPr id="38" name="Text 33"/>
-          <p:cNvSpPr/>
-          <p:nvPr/>
-        </p:nvSpPr>
-        <p:spPr>
-          <a:xfrm>
-            <a:off x="6984187" y="5458968"/>
-            <a:ext cx="1285646" cy="310896"/>
-          </a:xfrm>
-          <a:prstGeom prst="rect">
-            <a:avLst/>
-          </a:prstGeom>
-          <a:noFill/>
-          <a:ln/>
-        </p:spPr>
-        <p:txBody>
-          <a:bodyPr wrap="square" lIns="0" tIns="0" rIns="0" bIns="0" rtlCol="0" anchor="ctr"/>
-          <a:lstStyle/>
-          <a:p>
-            <a:pPr marL="0" indent="0" algn="ctr">
-              <a:buNone/>
-            </a:pPr>
-            <a:r>
-              <a:rPr lang="en-US" sz="1100" dirty="0">
-                <a:solidFill>
-                  <a:srgbClr val="2F5965"/>
-                </a:solidFill>
-                <a:latin typeface="Calibri" pitchFamily="34" charset="0"/>
-                <a:ea typeface="Calibri" pitchFamily="34" charset="-122"/>
-                <a:cs typeface="Calibri" pitchFamily="34" charset="-120"/>
-              </a:rPr>
-              <a:t>overwork_flag</a:t>
-            </a:r>
-            <a:endParaRPr lang="en-US" sz="1100" dirty="0"/>
-          </a:p>
-        </p:txBody>
-      </p:sp>
+      <p:grpSp>
+        <p:nvGrpSpPr>
+          <p:cNvPr id="45" name="Gruppo 44">
+            <a:extLst>
+              <a:ext uri="{FF2B5EF4-FFF2-40B4-BE49-F238E27FC236}">
+                <a16:creationId xmlns:a16="http://schemas.microsoft.com/office/drawing/2014/main" id="{595E7CE1-EE1C-4A1D-BD48-9FD8862B464F}"/>
+              </a:ext>
+            </a:extLst>
+          </p:cNvPr>
+          <p:cNvGrpSpPr/>
+          <p:nvPr/>
+        </p:nvGrpSpPr>
+        <p:grpSpPr>
+          <a:xfrm>
+            <a:off x="937260" y="5466603"/>
+            <a:ext cx="1850176" cy="705960"/>
+            <a:chOff x="2696279" y="5437008"/>
+            <a:chExt cx="1850176" cy="705960"/>
+          </a:xfrm>
+        </p:grpSpPr>
+        <p:sp>
+          <p:nvSpPr>
+            <p:cNvPr id="29" name="Shape 24"/>
+            <p:cNvSpPr/>
+            <p:nvPr/>
+          </p:nvSpPr>
+          <p:spPr>
+            <a:xfrm>
+              <a:off x="2696279" y="5458968"/>
+              <a:ext cx="1850176" cy="684000"/>
+            </a:xfrm>
+            <a:prstGeom prst="roundRect">
+              <a:avLst>
+                <a:gd name="adj" fmla="val 50000"/>
+              </a:avLst>
+            </a:prstGeom>
+            <a:solidFill>
+              <a:srgbClr val="E6EDEF"/>
+            </a:solidFill>
+            <a:ln/>
+          </p:spPr>
+          <p:txBody>
+            <a:bodyPr/>
+            <a:lstStyle/>
+            <a:p>
+              <a:endParaRPr lang="it-IT"/>
+            </a:p>
+          </p:txBody>
+        </p:sp>
+        <p:sp>
+          <p:nvSpPr>
+            <p:cNvPr id="30" name="Text 25"/>
+            <p:cNvSpPr/>
+            <p:nvPr/>
+          </p:nvSpPr>
+          <p:spPr>
+            <a:xfrm>
+              <a:off x="2963544" y="5437008"/>
+              <a:ext cx="1360627" cy="684000"/>
+            </a:xfrm>
+            <a:prstGeom prst="rect">
+              <a:avLst/>
+            </a:prstGeom>
+            <a:noFill/>
+            <a:ln/>
+          </p:spPr>
+          <p:txBody>
+            <a:bodyPr wrap="square" lIns="0" tIns="0" rIns="0" bIns="0" rtlCol="0" anchor="ctr"/>
+            <a:lstStyle/>
+            <a:p>
+              <a:pPr marL="0" indent="0" algn="ctr">
+                <a:buNone/>
+              </a:pPr>
+              <a:r>
+                <a:rPr lang="en-US" sz="1100" dirty="0">
+                  <a:solidFill>
+                    <a:srgbClr val="2F5965"/>
+                  </a:solidFill>
+                  <a:latin typeface="Calibri" pitchFamily="34" charset="0"/>
+                  <a:ea typeface="Calibri" pitchFamily="34" charset="-122"/>
+                  <a:cs typeface="Calibri" pitchFamily="34" charset="-120"/>
+                </a:rPr>
+                <a:t>work_intensity</a:t>
+              </a:r>
+              <a:endParaRPr lang="en-US" sz="1100" dirty="0"/>
+            </a:p>
+            <a:p>
+              <a:r>
+                <a:rPr sz="900" i="1" dirty="0" err="1">
+                  <a:solidFill>
+                    <a:srgbClr val="646464"/>
+                  </a:solidFill>
+                </a:rPr>
+                <a:t>work_hours</a:t>
+              </a:r>
+              <a:r>
+                <a:rPr sz="900" i="1" dirty="0">
+                  <a:solidFill>
+                    <a:srgbClr val="646464"/>
+                  </a:solidFill>
+                </a:rPr>
+                <a:t> ÷ </a:t>
+              </a:r>
+              <a:r>
+                <a:rPr sz="900" i="1" dirty="0" err="1">
+                  <a:solidFill>
+                    <a:srgbClr val="646464"/>
+                  </a:solidFill>
+                </a:rPr>
+                <a:t>breaks_taken</a:t>
+              </a:r>
+              <a:r>
+                <a:rPr sz="900" i="1" dirty="0">
+                  <a:solidFill>
+                    <a:srgbClr val="646464"/>
+                  </a:solidFill>
+                </a:rPr>
+                <a:t>  →  net work pressure</a:t>
+              </a:r>
+            </a:p>
+          </p:txBody>
+        </p:sp>
+      </p:grpSp>
+      <p:grpSp>
+        <p:nvGrpSpPr>
+          <p:cNvPr id="44" name="Gruppo 43">
+            <a:extLst>
+              <a:ext uri="{FF2B5EF4-FFF2-40B4-BE49-F238E27FC236}">
+                <a16:creationId xmlns:a16="http://schemas.microsoft.com/office/drawing/2014/main" id="{4F720856-6415-96FC-A91C-8D5E3EB3DBC2}"/>
+              </a:ext>
+            </a:extLst>
+          </p:cNvPr>
+          <p:cNvGrpSpPr/>
+          <p:nvPr/>
+        </p:nvGrpSpPr>
+        <p:grpSpPr>
+          <a:xfrm>
+            <a:off x="5212391" y="5486764"/>
+            <a:ext cx="1994815" cy="703088"/>
+            <a:chOff x="2259867" y="5458058"/>
+            <a:chExt cx="1994815" cy="703088"/>
+          </a:xfrm>
+        </p:grpSpPr>
+        <p:sp>
+          <p:nvSpPr>
+            <p:cNvPr id="31" name="Shape 26"/>
+            <p:cNvSpPr/>
+            <p:nvPr/>
+          </p:nvSpPr>
+          <p:spPr>
+            <a:xfrm>
+              <a:off x="2259867" y="5458058"/>
+              <a:ext cx="1994815" cy="684000"/>
+            </a:xfrm>
+            <a:prstGeom prst="roundRect">
+              <a:avLst>
+                <a:gd name="adj" fmla="val 50000"/>
+              </a:avLst>
+            </a:prstGeom>
+            <a:solidFill>
+              <a:srgbClr val="E6EDEF"/>
+            </a:solidFill>
+            <a:ln/>
+          </p:spPr>
+          <p:txBody>
+            <a:bodyPr/>
+            <a:lstStyle/>
+            <a:p>
+              <a:endParaRPr lang="it-IT"/>
+            </a:p>
+          </p:txBody>
+        </p:sp>
+        <p:sp>
+          <p:nvSpPr>
+            <p:cNvPr id="32" name="Text 27"/>
+            <p:cNvSpPr/>
+            <p:nvPr/>
+          </p:nvSpPr>
+          <p:spPr>
+            <a:xfrm>
+              <a:off x="2560922" y="5477146"/>
+              <a:ext cx="1585570" cy="684000"/>
+            </a:xfrm>
+            <a:prstGeom prst="rect">
+              <a:avLst/>
+            </a:prstGeom>
+            <a:noFill/>
+            <a:ln/>
+          </p:spPr>
+          <p:txBody>
+            <a:bodyPr wrap="square" lIns="0" tIns="0" rIns="0" bIns="0" rtlCol="0" anchor="ctr"/>
+            <a:lstStyle/>
+            <a:p>
+              <a:pPr marL="0" indent="0" algn="ctr">
+                <a:buNone/>
+              </a:pPr>
+              <a:r>
+                <a:rPr lang="en-US" sz="1100" dirty="0">
+                  <a:solidFill>
+                    <a:srgbClr val="2F5965"/>
+                  </a:solidFill>
+                  <a:latin typeface="Calibri" pitchFamily="34" charset="0"/>
+                  <a:ea typeface="Calibri" pitchFamily="34" charset="-122"/>
+                  <a:cs typeface="Calibri" pitchFamily="34" charset="-120"/>
+                </a:rPr>
+                <a:t>screen_work_ratio</a:t>
+              </a:r>
+              <a:endParaRPr lang="en-US" sz="1100" dirty="0"/>
+            </a:p>
+            <a:p>
+              <a:r>
+                <a:rPr sz="900" i="1" dirty="0" err="1">
+                  <a:solidFill>
+                    <a:srgbClr val="646464"/>
+                  </a:solidFill>
+                </a:rPr>
+                <a:t>screen_time</a:t>
+              </a:r>
+              <a:r>
+                <a:rPr sz="900" i="1" dirty="0">
+                  <a:solidFill>
+                    <a:srgbClr val="646464"/>
+                  </a:solidFill>
+                </a:rPr>
+                <a:t> ÷ </a:t>
+              </a:r>
+              <a:r>
+                <a:rPr sz="900" i="1" dirty="0" err="1">
+                  <a:solidFill>
+                    <a:srgbClr val="646464"/>
+                  </a:solidFill>
+                </a:rPr>
+                <a:t>work_hours</a:t>
+              </a:r>
+              <a:r>
+                <a:rPr sz="900" i="1" dirty="0">
+                  <a:solidFill>
+                    <a:srgbClr val="646464"/>
+                  </a:solidFill>
+                </a:rPr>
+                <a:t>  →  display exposure rate</a:t>
+              </a:r>
+            </a:p>
+          </p:txBody>
+        </p:sp>
+      </p:grpSp>
+      <p:grpSp>
+        <p:nvGrpSpPr>
+          <p:cNvPr id="43" name="Gruppo 42">
+            <a:extLst>
+              <a:ext uri="{FF2B5EF4-FFF2-40B4-BE49-F238E27FC236}">
+                <a16:creationId xmlns:a16="http://schemas.microsoft.com/office/drawing/2014/main" id="{CA117266-D810-BF86-5610-DAAB230EB75C}"/>
+              </a:ext>
+            </a:extLst>
+          </p:cNvPr>
+          <p:cNvGrpSpPr/>
+          <p:nvPr/>
+        </p:nvGrpSpPr>
+        <p:grpSpPr>
+          <a:xfrm>
+            <a:off x="3074825" y="5487674"/>
+            <a:ext cx="1850177" cy="705960"/>
+            <a:chOff x="4043476" y="5437008"/>
+            <a:chExt cx="1850177" cy="705960"/>
+          </a:xfrm>
+        </p:grpSpPr>
+        <p:sp>
+          <p:nvSpPr>
+            <p:cNvPr id="33" name="Shape 28"/>
+            <p:cNvSpPr/>
+            <p:nvPr/>
+          </p:nvSpPr>
+          <p:spPr>
+            <a:xfrm>
+              <a:off x="4043476" y="5458968"/>
+              <a:ext cx="1850177" cy="684000"/>
+            </a:xfrm>
+            <a:prstGeom prst="roundRect">
+              <a:avLst>
+                <a:gd name="adj" fmla="val 50000"/>
+              </a:avLst>
+            </a:prstGeom>
+            <a:solidFill>
+              <a:srgbClr val="E6EDEF"/>
+            </a:solidFill>
+            <a:ln/>
+          </p:spPr>
+          <p:txBody>
+            <a:bodyPr/>
+            <a:lstStyle/>
+            <a:p>
+              <a:endParaRPr lang="it-IT"/>
+            </a:p>
+          </p:txBody>
+        </p:sp>
+        <p:sp>
+          <p:nvSpPr>
+            <p:cNvPr id="34" name="Text 29"/>
+            <p:cNvSpPr/>
+            <p:nvPr/>
+          </p:nvSpPr>
+          <p:spPr>
+            <a:xfrm>
+              <a:off x="4301642" y="5437008"/>
+              <a:ext cx="1435608" cy="684000"/>
+            </a:xfrm>
+            <a:prstGeom prst="rect">
+              <a:avLst/>
+            </a:prstGeom>
+            <a:noFill/>
+            <a:ln/>
+          </p:spPr>
+          <p:txBody>
+            <a:bodyPr wrap="square" lIns="0" tIns="0" rIns="0" bIns="0" rtlCol="0" anchor="ctr"/>
+            <a:lstStyle/>
+            <a:p>
+              <a:pPr marL="0" indent="0" algn="ctr">
+                <a:buNone/>
+              </a:pPr>
+              <a:r>
+                <a:rPr lang="en-US" sz="1100" dirty="0">
+                  <a:solidFill>
+                    <a:srgbClr val="2F5965"/>
+                  </a:solidFill>
+                  <a:latin typeface="Calibri" pitchFamily="34" charset="0"/>
+                  <a:ea typeface="Calibri" pitchFamily="34" charset="-122"/>
+                  <a:cs typeface="Calibri" pitchFamily="34" charset="-120"/>
+                </a:rPr>
+                <a:t>meeting_density</a:t>
+              </a:r>
+              <a:endParaRPr lang="en-US" sz="1100" dirty="0"/>
+            </a:p>
+            <a:p>
+              <a:r>
+                <a:rPr sz="900" i="1" dirty="0">
+                  <a:solidFill>
+                    <a:srgbClr val="646464"/>
+                  </a:solidFill>
+                </a:rPr>
+                <a:t>meetings ÷ </a:t>
+              </a:r>
+              <a:r>
+                <a:rPr sz="900" i="1" dirty="0" err="1">
+                  <a:solidFill>
+                    <a:srgbClr val="646464"/>
+                  </a:solidFill>
+                </a:rPr>
+                <a:t>work_hours</a:t>
+              </a:r>
+              <a:r>
+                <a:rPr sz="900" i="1" dirty="0">
+                  <a:solidFill>
+                    <a:srgbClr val="646464"/>
+                  </a:solidFill>
+                </a:rPr>
+                <a:t>  →  interruptions per hour</a:t>
+              </a:r>
+            </a:p>
+          </p:txBody>
+        </p:sp>
+      </p:grpSp>
+      <p:grpSp>
+        <p:nvGrpSpPr>
+          <p:cNvPr id="41" name="Gruppo 40">
+            <a:extLst>
+              <a:ext uri="{FF2B5EF4-FFF2-40B4-BE49-F238E27FC236}">
+                <a16:creationId xmlns:a16="http://schemas.microsoft.com/office/drawing/2014/main" id="{14E70B0A-320D-56CF-6332-581364DEF355}"/>
+              </a:ext>
+            </a:extLst>
+          </p:cNvPr>
+          <p:cNvGrpSpPr/>
+          <p:nvPr/>
+        </p:nvGrpSpPr>
+        <p:grpSpPr>
+          <a:xfrm>
+            <a:off x="7494595" y="5466603"/>
+            <a:ext cx="1557338" cy="684000"/>
+            <a:chOff x="5588813" y="5458968"/>
+            <a:chExt cx="1557338" cy="684000"/>
+          </a:xfrm>
+        </p:grpSpPr>
+        <p:sp>
+          <p:nvSpPr>
+            <p:cNvPr id="35" name="Shape 30"/>
+            <p:cNvSpPr/>
+            <p:nvPr/>
+          </p:nvSpPr>
+          <p:spPr>
+            <a:xfrm>
+              <a:off x="5588813" y="5458968"/>
+              <a:ext cx="1557338" cy="684000"/>
+            </a:xfrm>
+            <a:prstGeom prst="roundRect">
+              <a:avLst>
+                <a:gd name="adj" fmla="val 50000"/>
+              </a:avLst>
+            </a:prstGeom>
+            <a:solidFill>
+              <a:srgbClr val="E6EDEF"/>
+            </a:solidFill>
+            <a:ln/>
+          </p:spPr>
+          <p:txBody>
+            <a:bodyPr/>
+            <a:lstStyle/>
+            <a:p>
+              <a:endParaRPr lang="it-IT"/>
+            </a:p>
+          </p:txBody>
+        </p:sp>
+        <p:sp>
+          <p:nvSpPr>
+            <p:cNvPr id="36" name="Text 31"/>
+            <p:cNvSpPr/>
+            <p:nvPr/>
+          </p:nvSpPr>
+          <p:spPr>
+            <a:xfrm>
+              <a:off x="5754776" y="5458968"/>
+              <a:ext cx="1285646" cy="684000"/>
+            </a:xfrm>
+            <a:prstGeom prst="rect">
+              <a:avLst/>
+            </a:prstGeom>
+            <a:noFill/>
+            <a:ln/>
+          </p:spPr>
+          <p:txBody>
+            <a:bodyPr wrap="square" lIns="0" tIns="0" rIns="0" bIns="0" rtlCol="0" anchor="ctr"/>
+            <a:lstStyle/>
+            <a:p>
+              <a:pPr marL="0" indent="0" algn="ctr">
+                <a:buNone/>
+              </a:pPr>
+              <a:r>
+                <a:rPr lang="en-US" sz="1100" dirty="0">
+                  <a:solidFill>
+                    <a:srgbClr val="2F5965"/>
+                  </a:solidFill>
+                  <a:latin typeface="Calibri" pitchFamily="34" charset="0"/>
+                  <a:ea typeface="Calibri" pitchFamily="34" charset="-122"/>
+                  <a:cs typeface="Calibri" pitchFamily="34" charset="-120"/>
+                </a:rPr>
+                <a:t>sleep_deficit</a:t>
+              </a:r>
+              <a:endParaRPr lang="en-US" sz="1100" dirty="0"/>
+            </a:p>
+            <a:p>
+              <a:r>
+                <a:rPr sz="900" i="1" dirty="0">
+                  <a:solidFill>
+                    <a:srgbClr val="646464"/>
+                  </a:solidFill>
+                </a:rPr>
+                <a:t>max(0, 7 − </a:t>
+              </a:r>
+              <a:r>
+                <a:rPr sz="900" i="1" dirty="0" err="1">
+                  <a:solidFill>
+                    <a:srgbClr val="646464"/>
+                  </a:solidFill>
+                </a:rPr>
+                <a:t>sleep_hours</a:t>
+              </a:r>
+              <a:r>
+                <a:rPr sz="900" i="1" dirty="0">
+                  <a:solidFill>
+                    <a:srgbClr val="646464"/>
+                  </a:solidFill>
+                </a:rPr>
+                <a:t>)  →  hours below 7h threshold</a:t>
+              </a:r>
+            </a:p>
+          </p:txBody>
+        </p:sp>
+      </p:grpSp>
+      <p:grpSp>
+        <p:nvGrpSpPr>
+          <p:cNvPr id="42" name="Gruppo 41">
+            <a:extLst>
+              <a:ext uri="{FF2B5EF4-FFF2-40B4-BE49-F238E27FC236}">
+                <a16:creationId xmlns:a16="http://schemas.microsoft.com/office/drawing/2014/main" id="{3810414D-CDBE-5DE1-30CA-3F158B6FD51C}"/>
+              </a:ext>
+            </a:extLst>
+          </p:cNvPr>
+          <p:cNvGrpSpPr/>
+          <p:nvPr/>
+        </p:nvGrpSpPr>
+        <p:grpSpPr>
+          <a:xfrm>
+            <a:off x="9339321" y="5433226"/>
+            <a:ext cx="1457553" cy="733392"/>
+            <a:chOff x="8763304" y="5305320"/>
+            <a:chExt cx="1457553" cy="733392"/>
+          </a:xfrm>
+        </p:grpSpPr>
+        <p:sp>
+          <p:nvSpPr>
+            <p:cNvPr id="37" name="Shape 32"/>
+            <p:cNvSpPr/>
+            <p:nvPr/>
+          </p:nvSpPr>
+          <p:spPr>
+            <a:xfrm>
+              <a:off x="8763304" y="5354712"/>
+              <a:ext cx="1457553" cy="684000"/>
+            </a:xfrm>
+            <a:prstGeom prst="roundRect">
+              <a:avLst>
+                <a:gd name="adj" fmla="val 50000"/>
+              </a:avLst>
+            </a:prstGeom>
+            <a:solidFill>
+              <a:srgbClr val="E6EDEF"/>
+            </a:solidFill>
+            <a:ln/>
+          </p:spPr>
+          <p:txBody>
+            <a:bodyPr/>
+            <a:lstStyle/>
+            <a:p>
+              <a:endParaRPr lang="it-IT"/>
+            </a:p>
+          </p:txBody>
+        </p:sp>
+        <p:sp>
+          <p:nvSpPr>
+            <p:cNvPr id="38" name="Text 33"/>
+            <p:cNvSpPr/>
+            <p:nvPr/>
+          </p:nvSpPr>
+          <p:spPr>
+            <a:xfrm>
+              <a:off x="8855812" y="5305320"/>
+              <a:ext cx="1285646" cy="684000"/>
+            </a:xfrm>
+            <a:prstGeom prst="rect">
+              <a:avLst/>
+            </a:prstGeom>
+            <a:noFill/>
+            <a:ln/>
+          </p:spPr>
+          <p:txBody>
+            <a:bodyPr wrap="square" lIns="0" tIns="0" rIns="0" bIns="0" rtlCol="0" anchor="ctr"/>
+            <a:lstStyle/>
+            <a:p>
+              <a:pPr marL="0" indent="0" algn="ctr">
+                <a:buNone/>
+              </a:pPr>
+              <a:r>
+                <a:rPr lang="en-US" sz="1100" dirty="0">
+                  <a:solidFill>
+                    <a:srgbClr val="2F5965"/>
+                  </a:solidFill>
+                  <a:latin typeface="Calibri" pitchFamily="34" charset="0"/>
+                  <a:ea typeface="Calibri" pitchFamily="34" charset="-122"/>
+                  <a:cs typeface="Calibri" pitchFamily="34" charset="-120"/>
+                </a:rPr>
+                <a:t>overwork_flag</a:t>
+              </a:r>
+              <a:endParaRPr lang="en-US" sz="1100" dirty="0"/>
+            </a:p>
+            <a:p>
+              <a:r>
+                <a:rPr sz="900" i="1" dirty="0">
+                  <a:solidFill>
+                    <a:srgbClr val="646464"/>
+                  </a:solidFill>
+                </a:rPr>
+                <a:t>1 if </a:t>
+              </a:r>
+              <a:r>
+                <a:rPr sz="900" i="1" dirty="0" err="1">
+                  <a:solidFill>
+                    <a:srgbClr val="646464"/>
+                  </a:solidFill>
+                </a:rPr>
+                <a:t>work_hours</a:t>
+              </a:r>
+              <a:r>
+                <a:rPr sz="900" i="1" dirty="0">
+                  <a:solidFill>
+                    <a:srgbClr val="646464"/>
+                  </a:solidFill>
+                </a:rPr>
+                <a:t> &gt; 8, else 0</a:t>
+              </a:r>
+            </a:p>
+          </p:txBody>
+        </p:sp>
+      </p:grpSp>
       <p:sp>
         <p:nvSpPr>
           <p:cNvPr id="39" name="Text 34"/>
@@ -15001,7 +13360,7 @@
         <p:spPr>
           <a:xfrm>
             <a:off x="640080" y="1645920"/>
-            <a:ext cx="2522144" cy="1170432"/>
+            <a:ext cx="2522144" cy="1512720"/>
           </a:xfrm>
           <a:prstGeom prst="roundRect">
             <a:avLst>
@@ -15126,8 +13485,8 @@
         </p:nvSpPr>
         <p:spPr>
           <a:xfrm>
-            <a:off x="877824" y="2395728"/>
-            <a:ext cx="2046656" cy="182880"/>
+            <a:off x="766689" y="2367592"/>
+            <a:ext cx="2307101" cy="720000"/>
           </a:xfrm>
           <a:prstGeom prst="rect">
             <a:avLst/>
@@ -15139,24 +13498,17 @@
           <a:bodyPr wrap="square" lIns="0" tIns="0" rIns="0" bIns="0" rtlCol="0" anchor="ctr"/>
           <a:lstStyle/>
           <a:p>
-            <a:pPr marL="0" indent="0">
-              <a:lnSpc>
-                <a:spcPct val="118000"/>
-              </a:lnSpc>
-              <a:buNone/>
-            </a:pPr>
-            <a:r>
-              <a:rPr lang="en-US" sz="1130" dirty="0">
-                <a:solidFill>
-                  <a:srgbClr val="5B6270"/>
-                </a:solidFill>
-                <a:latin typeface="Calibri" pitchFamily="34" charset="0"/>
-                <a:ea typeface="Calibri" pitchFamily="34" charset="-122"/>
-                <a:cs typeface="Calibri" pitchFamily="34" charset="-120"/>
-              </a:rPr>
-              <a:t>Dummy models define the minimum acceptable result.</a:t>
-            </a:r>
-            <a:endParaRPr lang="en-US" sz="1130" dirty="0"/>
+            <a:r>
+              <a:rPr lang="en-US" sz="1100" dirty="0"/>
+              <a:t>DummyRegressor predicts the training-set median. </a:t>
+            </a:r>
+            <a:br>
+              <a:rPr lang="en-US" sz="1100" dirty="0"/>
+            </a:br>
+            <a:r>
+              <a:rPr lang="en-US" sz="1100" dirty="0"/>
+              <a:t>Sets the performance floor: CV MAE 18.49. Any model failing to beat this is useless.</a:t>
+            </a:r>
           </a:p>
         </p:txBody>
       </p:sp>
@@ -15169,7 +13521,7 @@
         <p:spPr>
           <a:xfrm>
             <a:off x="3436544" y="1645920"/>
-            <a:ext cx="2522144" cy="1170432"/>
+            <a:ext cx="2522144" cy="1512720"/>
           </a:xfrm>
           <a:prstGeom prst="roundRect">
             <a:avLst>
@@ -15294,8 +13646,8 @@
         </p:nvSpPr>
         <p:spPr>
           <a:xfrm>
-            <a:off x="3674288" y="2395728"/>
-            <a:ext cx="2046656" cy="182880"/>
+            <a:off x="3530991" y="2353524"/>
+            <a:ext cx="2342271" cy="720000"/>
           </a:xfrm>
           <a:prstGeom prst="rect">
             <a:avLst/>
@@ -15307,24 +13659,17 @@
           <a:bodyPr wrap="square" lIns="0" tIns="0" rIns="0" bIns="0" rtlCol="0" anchor="ctr"/>
           <a:lstStyle/>
           <a:p>
-            <a:pPr marL="0" indent="0">
-              <a:lnSpc>
-                <a:spcPct val="118000"/>
-              </a:lnSpc>
-              <a:buNone/>
-            </a:pPr>
-            <a:r>
-              <a:rPr lang="en-US" sz="1130" dirty="0">
-                <a:solidFill>
-                  <a:srgbClr val="5B6270"/>
-                </a:solidFill>
-                <a:latin typeface="Calibri" pitchFamily="34" charset="0"/>
-                <a:ea typeface="Calibri" pitchFamily="34" charset="-122"/>
-                <a:cs typeface="Calibri" pitchFamily="34" charset="-120"/>
-              </a:rPr>
-              <a:t>Ridge checks whether the signal is mostly linear.</a:t>
-            </a:r>
-            <a:endParaRPr lang="en-US" sz="1130" dirty="0"/>
+            <a:r>
+              <a:rPr lang="en-US" sz="1100" dirty="0"/>
+              <a:t>Ridge adds L2 regularisation to prevent unstable coefficients when features correlate. </a:t>
+            </a:r>
+            <a:br>
+              <a:rPr lang="en-US" sz="1100" dirty="0"/>
+            </a:br>
+            <a:r>
+              <a:rPr lang="en-US" sz="1100" dirty="0"/>
+              <a:t>The CV MAE 5.06 confirms the signal is mostly linear.</a:t>
+            </a:r>
           </a:p>
         </p:txBody>
       </p:sp>
@@ -15337,7 +13682,7 @@
         <p:spPr>
           <a:xfrm>
             <a:off x="6233008" y="1645920"/>
-            <a:ext cx="2522144" cy="1170432"/>
+            <a:ext cx="2522144" cy="1553778"/>
           </a:xfrm>
           <a:prstGeom prst="roundRect">
             <a:avLst>
@@ -15462,8 +13807,8 @@
         </p:nvSpPr>
         <p:spPr>
           <a:xfrm>
-            <a:off x="6470752" y="2395728"/>
-            <a:ext cx="2046656" cy="182880"/>
+            <a:off x="6269582" y="2282310"/>
+            <a:ext cx="2522145" cy="720000"/>
           </a:xfrm>
           <a:prstGeom prst="rect">
             <a:avLst/>
@@ -15475,24 +13820,24 @@
           <a:bodyPr wrap="square" lIns="0" tIns="0" rIns="0" bIns="0" rtlCol="0" anchor="ctr"/>
           <a:lstStyle/>
           <a:p>
-            <a:pPr marL="0" indent="0">
-              <a:lnSpc>
-                <a:spcPct val="118000"/>
-              </a:lnSpc>
-              <a:buNone/>
+            <a:pPr marL="171450" indent="-171450">
+              <a:buFont typeface="Arial" panose="020B0604020202020204" pitchFamily="34" charset="0"/>
+              <a:buChar char="•"/>
             </a:pPr>
             <a:r>
-              <a:rPr lang="en-US" sz="1130" dirty="0">
-                <a:solidFill>
-                  <a:srgbClr val="5B6270"/>
-                </a:solidFill>
-                <a:latin typeface="Calibri" pitchFamily="34" charset="0"/>
-                <a:ea typeface="Calibri" pitchFamily="34" charset="-122"/>
-                <a:cs typeface="Calibri" pitchFamily="34" charset="-120"/>
-              </a:rPr>
-              <a:t>Random Forest and Gradient Boosting capture interactions.</a:t>
-            </a:r>
-            <a:endParaRPr lang="en-US" sz="1130" dirty="0"/>
+              <a:rPr lang="en-US" sz="1100" dirty="0"/>
+              <a:t>Random Forest: 300 trees on bootstrap samples, averaged for lower variance. </a:t>
+            </a:r>
+          </a:p>
+          <a:p>
+            <a:pPr marL="171450" indent="-171450">
+              <a:buFont typeface="Arial" panose="020B0604020202020204" pitchFamily="34" charset="0"/>
+              <a:buChar char="•"/>
+            </a:pPr>
+            <a:r>
+              <a:rPr lang="en-US" sz="1100" dirty="0"/>
+              <a:t>Hist Gradient Boosting: sequential trees, each correcting the previous residuals.</a:t>
+            </a:r>
           </a:p>
         </p:txBody>
       </p:sp>
@@ -15505,7 +13850,7 @@
         <p:spPr>
           <a:xfrm>
             <a:off x="9029471" y="1645920"/>
-            <a:ext cx="2522144" cy="1170432"/>
+            <a:ext cx="2522144" cy="1553778"/>
           </a:xfrm>
           <a:prstGeom prst="roundRect">
             <a:avLst>
@@ -15630,8 +13975,8 @@
         </p:nvSpPr>
         <p:spPr>
           <a:xfrm>
-            <a:off x="9267215" y="2395728"/>
-            <a:ext cx="2046656" cy="182880"/>
+            <a:off x="9122898" y="2395728"/>
+            <a:ext cx="2343291" cy="720000"/>
           </a:xfrm>
           <a:prstGeom prst="rect">
             <a:avLst/>
@@ -15643,24 +13988,10 @@
           <a:bodyPr wrap="square" lIns="0" tIns="0" rIns="0" bIns="0" rtlCol="0" anchor="ctr"/>
           <a:lstStyle/>
           <a:p>
-            <a:pPr marL="0" indent="0">
-              <a:lnSpc>
-                <a:spcPct val="118000"/>
-              </a:lnSpc>
-              <a:buNone/>
-            </a:pPr>
-            <a:r>
-              <a:rPr lang="en-US" sz="1130" dirty="0">
-                <a:solidFill>
-                  <a:srgbClr val="5B6270"/>
-                </a:solidFill>
-                <a:latin typeface="Calibri" pitchFamily="34" charset="0"/>
-                <a:ea typeface="Calibri" pitchFamily="34" charset="-122"/>
-                <a:cs typeface="Calibri" pitchFamily="34" charset="-120"/>
-              </a:rPr>
-              <a:t>GroupKFold keeps user-level grouping during model selection.</a:t>
-            </a:r>
-            <a:endParaRPr lang="en-US" sz="1130" dirty="0"/>
+            <a:r>
+              <a:rPr lang="en-US" sz="1100" dirty="0"/>
+              <a:t>5-fold GroupKFold keeps user grouping intact inside each fold using same constraint as the main split, preventing any employee from leaking across validation boundaries.</a:t>
+            </a:r>
           </a:p>
         </p:txBody>
       </p:sp>
@@ -15672,7 +14003,7 @@
         </p:nvSpPr>
         <p:spPr>
           <a:xfrm>
-            <a:off x="640080" y="3136392"/>
+            <a:off x="640080" y="3199698"/>
             <a:ext cx="10911535" cy="292608"/>
           </a:xfrm>
           <a:prstGeom prst="rect">
@@ -16045,7 +14376,7 @@
                           <a:ea typeface="Calibri" pitchFamily="34" charset="-122"/>
                           <a:cs typeface="Calibri" pitchFamily="34" charset="-120"/>
                         </a:rPr>
-                        <a:t>4.97</a:t>
+                        <a:t>4.89</a:t>
                       </a:r>
                       <a:endParaRPr lang="en-US" sz="1200" dirty="0">
                         <a:latin typeface="Calibri" charset="0"/>
@@ -16113,7 +14444,7 @@
                           <a:ea typeface="Calibri" pitchFamily="34" charset="-122"/>
                           <a:cs typeface="Calibri" pitchFamily="34" charset="-120"/>
                         </a:rPr>
-                        <a:t>0.923</a:t>
+                        <a:t>0.925</a:t>
                       </a:r>
                       <a:endParaRPr lang="en-US" sz="1200" dirty="0">
                         <a:latin typeface="Calibri" charset="0"/>
@@ -16467,7 +14798,7 @@
                           <a:ea typeface="Calibri" pitchFamily="34" charset="-122"/>
                           <a:cs typeface="Calibri" pitchFamily="34" charset="-120"/>
                         </a:rPr>
-                        <a:t>5.19</a:t>
+                        <a:t>5.13</a:t>
                       </a:r>
                       <a:endParaRPr lang="en-US" sz="1200" dirty="0">
                         <a:latin typeface="Calibri" charset="0"/>
@@ -16535,7 +14866,7 @@
                           <a:ea typeface="Calibri" pitchFamily="34" charset="-122"/>
                           <a:cs typeface="Calibri" pitchFamily="34" charset="-120"/>
                         </a:rPr>
-                        <a:t>0.917</a:t>
+                        <a:t>0.918</a:t>
                       </a:r>
                       <a:endParaRPr lang="en-US" sz="1200" dirty="0">
                         <a:latin typeface="Calibri" charset="0"/>
@@ -16678,7 +15009,7 @@
                           <a:ea typeface="Calibri" pitchFamily="34" charset="-122"/>
                           <a:cs typeface="Calibri" pitchFamily="34" charset="-120"/>
                         </a:rPr>
-                        <a:t>9.03</a:t>
+                        <a:t>9.05</a:t>
                       </a:r>
                       <a:endParaRPr lang="en-US" sz="1200" dirty="0">
                         <a:latin typeface="Calibri" charset="0"/>
@@ -16746,7 +15077,7 @@
                           <a:ea typeface="Calibri" pitchFamily="34" charset="-122"/>
                           <a:cs typeface="Calibri" pitchFamily="34" charset="-120"/>
                         </a:rPr>
-                        <a:t>0.744</a:t>
+                        <a:t>0.742</a:t>
                       </a:r>
                       <a:endParaRPr lang="en-US" sz="1200" dirty="0">
                         <a:latin typeface="Calibri" charset="0"/>
@@ -16889,7 +15220,7 @@
                           <a:ea typeface="Calibri" pitchFamily="34" charset="-122"/>
                           <a:cs typeface="Calibri" pitchFamily="34" charset="-120"/>
                         </a:rPr>
-                        <a:t>18.46</a:t>
+                        <a:t>18.49</a:t>
                       </a:r>
                       <a:endParaRPr lang="en-US" sz="1200" dirty="0">
                         <a:latin typeface="Calibri" charset="0"/>
@@ -16957,7 +15288,7 @@
                           <a:ea typeface="Calibri" pitchFamily="34" charset="-122"/>
                           <a:cs typeface="Calibri" pitchFamily="34" charset="-120"/>
                         </a:rPr>
-                        <a:t>−0.046</a:t>
+                        <a:t>−0.049</a:t>
                       </a:r>
                       <a:endParaRPr lang="en-US" sz="1200" dirty="0">
                         <a:latin typeface="Calibri" charset="0"/>
@@ -17027,7 +15358,7 @@
         <p:spPr>
           <a:xfrm>
             <a:off x="640080" y="5788152"/>
-            <a:ext cx="10911535" cy="274320"/>
+            <a:ext cx="10911535" cy="324000"/>
           </a:xfrm>
           <a:prstGeom prst="rect">
             <a:avLst/>
@@ -17039,21 +15370,16 @@
           <a:bodyPr wrap="square" lIns="0" tIns="0" rIns="0" bIns="0" rtlCol="0" anchor="ctr"/>
           <a:lstStyle/>
           <a:p>
-            <a:pPr marL="0" indent="0">
-              <a:buNone/>
-            </a:pPr>
-            <a:r>
-              <a:rPr lang="en-US" sz="1100" i="1" dirty="0">
-                <a:solidFill>
-                  <a:srgbClr val="8A8F9B"/>
-                </a:solidFill>
-                <a:latin typeface="Calibri" pitchFamily="34" charset="0"/>
-                <a:ea typeface="Calibri" pitchFamily="34" charset="-122"/>
-                <a:cs typeface="Calibri" pitchFamily="34" charset="-120"/>
-              </a:rPr>
-              <a:t>Random Forest wins on cross-validation and is selected for tuning.</a:t>
-            </a:r>
-            <a:endParaRPr lang="en-US" sz="1100" dirty="0"/>
+            <a:r>
+              <a:rPr lang="en-US" sz="1100" dirty="0"/>
+              <a:t>Random Forest wins on CV (MAE 4.89) and is selected for tuning. </a:t>
+            </a:r>
+          </a:p>
+          <a:p>
+            <a:r>
+              <a:rPr lang="en-US" sz="1100" dirty="0"/>
+              <a:t>KNN scores 9.05: with 13 scaled features, training points become nearly equidistant and local neighbourhoods lose predictive meaning.</a:t>
+            </a:r>
           </a:p>
         </p:txBody>
       </p:sp>
@@ -19012,7 +17338,7 @@
         <p:spPr>
           <a:xfrm>
             <a:off x="640080" y="4325112"/>
-            <a:ext cx="6812280" cy="274320"/>
+            <a:ext cx="6812280" cy="288000"/>
           </a:xfrm>
           <a:prstGeom prst="rect">
             <a:avLst/>
@@ -19024,21 +17350,10 @@
           <a:bodyPr wrap="square" lIns="0" tIns="0" rIns="0" bIns="0" rtlCol="0" anchor="ctr"/>
           <a:lstStyle/>
           <a:p>
-            <a:pPr marL="0" indent="0">
-              <a:buNone/>
-            </a:pPr>
-            <a:r>
-              <a:rPr lang="en-US" sz="1100" i="1" dirty="0">
-                <a:solidFill>
-                  <a:srgbClr val="8A8F9B"/>
-                </a:solidFill>
-                <a:latin typeface="Calibri" pitchFamily="34" charset="0"/>
-                <a:ea typeface="Calibri" pitchFamily="34" charset="-122"/>
-                <a:cs typeface="Calibri" pitchFamily="34" charset="-120"/>
-              </a:rPr>
-              <a:t>Test-set results, before hyperparameter tuning.</a:t>
-            </a:r>
-            <a:endParaRPr lang="en-US" sz="1100" dirty="0"/>
+            <a:r>
+              <a:rPr lang="en-US" dirty="0"/>
+              <a:t>Test-set results before hyperparameter tuning.</a:t>
+            </a:r>
           </a:p>
         </p:txBody>
       </p:sp>
@@ -19050,8 +17365,8 @@
         </p:nvSpPr>
         <p:spPr>
           <a:xfrm>
-            <a:off x="7863840" y="1691640"/>
-            <a:ext cx="3687775" cy="4324958"/>
+            <a:off x="7863840" y="1691639"/>
+            <a:ext cx="3687775" cy="4440219"/>
           </a:xfrm>
           <a:prstGeom prst="roundRect">
             <a:avLst>
@@ -19189,7 +17504,7 @@
                 <a:ea typeface="Cambria" pitchFamily="34" charset="-122"/>
                 <a:cs typeface="Cambria" pitchFamily="34" charset="-120"/>
               </a:rPr>
-              <a:t>4.88</a:t>
+              <a:t>4.84</a:t>
             </a:r>
             <a:endParaRPr lang="en-US" sz="3600" dirty="0"/>
           </a:p>
@@ -19267,7 +17582,7 @@
                 <a:ea typeface="Cambria" pitchFamily="34" charset="-122"/>
                 <a:cs typeface="Cambria" pitchFamily="34" charset="-120"/>
               </a:rPr>
-              <a:t>6.21</a:t>
+              <a:t>6.26</a:t>
             </a:r>
             <a:endParaRPr lang="en-US" sz="3600" dirty="0"/>
           </a:p>
@@ -19345,7 +17660,7 @@
                 <a:ea typeface="Cambria" pitchFamily="34" charset="-122"/>
                 <a:cs typeface="Cambria" pitchFamily="34" charset="-120"/>
               </a:rPr>
-              <a:t>0.936</a:t>
+              <a:t>0.935</a:t>
             </a:r>
             <a:endParaRPr lang="en-US" sz="3600" dirty="0"/>
           </a:p>
@@ -19428,8 +17743,8 @@
         </p:nvSpPr>
         <p:spPr>
           <a:xfrm>
-            <a:off x="8138160" y="5394960"/>
-            <a:ext cx="3139135" cy="411480"/>
+            <a:off x="8138160" y="5395207"/>
+            <a:ext cx="3139135" cy="539249"/>
           </a:xfrm>
           <a:prstGeom prst="rect">
             <a:avLst/>
@@ -19441,24 +17756,14 @@
           <a:bodyPr wrap="square" lIns="0" tIns="0" rIns="0" bIns="0" rtlCol="0" anchor="ctr"/>
           <a:lstStyle/>
           <a:p>
-            <a:pPr marL="0" indent="0">
-              <a:lnSpc>
-                <a:spcPct val="120000"/>
-              </a:lnSpc>
-              <a:buNone/>
-            </a:pPr>
-            <a:r>
-              <a:rPr lang="en-US" sz="1000" dirty="0">
-                <a:solidFill>
-                  <a:srgbClr val="8089A0"/>
-                </a:solidFill>
-                <a:latin typeface="Calibri" pitchFamily="34" charset="0"/>
-                <a:ea typeface="Calibri" pitchFamily="34" charset="-122"/>
-                <a:cs typeface="Calibri" pitchFamily="34" charset="-120"/>
-              </a:rPr>
-              <a:t>200 trees · max depth 4 · min leaf 8, selected via RandomizedSearchCV on training-set GroupKFold.</a:t>
-            </a:r>
-            <a:endParaRPr lang="en-US" sz="1000" dirty="0"/>
+            <a:r>
+              <a:rPr lang="en-US" sz="900" dirty="0">
+                <a:solidFill>
+                  <a:schemeClr val="bg1"/>
+                </a:solidFill>
+              </a:rPr>
+              <a:t>Params: n_estimators=200 · max_features=0.7 · min_samples_leaf=4 · max_depth=None.</a:t>
+            </a:r>
           </a:p>
         </p:txBody>
       </p:sp>
@@ -19823,7 +18128,7 @@
                 <a:ea typeface="Calibri" pitchFamily="34" charset="-122"/>
                 <a:cs typeface="Calibri" pitchFamily="34" charset="-120"/>
               </a:rPr>
-              <a:t>Dropping it pushes Random Forest MAE from 4.88 to 20.26, within noise of the dummy median baseline (≈20.35).</a:t>
+              <a:t>Dropping it pushes Random Forest MAE from 4.85 to 20.26, within noise of the dummy median baseline (≈20.35).</a:t>
             </a:r>
             <a:endParaRPr lang="en-US" sz="1200" dirty="0"/>
           </a:p>
